--- a/project_23_meeting_summarization/presentations/project_presentation.pptx
+++ b/project_23_meeting_summarization/presentations/project_presentation.pptx
@@ -13,6 +13,13 @@
     <p:sldId id="261" r:id="rId12"/>
     <p:sldId id="262" r:id="rId13"/>
     <p:sldId id="263" r:id="rId14"/>
+    <p:sldId id="264" r:id="rId15"/>
+    <p:sldId id="265" r:id="rId16"/>
+    <p:sldId id="266" r:id="rId17"/>
+    <p:sldId id="267" r:id="rId18"/>
+    <p:sldId id="268" r:id="rId19"/>
+    <p:sldId id="269" r:id="rId20"/>
+    <p:sldId id="270" r:id="rId21"/>
   </p:sldIdLst>
   <p:sldSz cx="12191695" cy="6858000" type="screen4x3"/>
   <p:notesSz cx="6858000" cy="9144000"/>
@@ -3110,7 +3117,7 @@
             <a:avLst/>
           </a:prstGeom>
           <a:solidFill>
-            <a:srgbClr val="0F172A"/>
+            <a:srgbClr val="070E17"/>
           </a:solidFill>
           <a:ln>
             <a:noFill/>
@@ -3146,8 +3153,8 @@
         </p:nvSpPr>
         <p:spPr>
           <a:xfrm>
-            <a:off x="1097280" y="1645920"/>
-            <a:ext cx="10058400" cy="3474720"/>
+            <a:off x="914400" y="1645920"/>
+            <a:ext cx="10362895" cy="3840480"/>
           </a:xfrm>
           <a:prstGeom prst="rect">
             <a:avLst/>
@@ -3161,44 +3168,1519 @@
           <a:lstStyle/>
           <a:p>
             <a:pPr>
-              <a:defRPr sz="1400" b="1">
-                <a:solidFill>
-                  <a:srgbClr val="38BDF8"/>
-                </a:solidFill>
-              </a:defRPr>
-            </a:pPr>
-            <a:r>
-              <a:t>PROJECT 23 OF 55  •  RESEARCH &amp; IMPLEMENTATION DECK</a:t>
-            </a:r>
-          </a:p>
-          <a:p>
-            <a:pPr>
-              <a:spcBef>
-                <a:spcPts val="1400"/>
-              </a:spcBef>
-              <a:defRPr sz="3200" b="1">
-                <a:solidFill>
-                  <a:srgbClr val="FFFFFF"/>
-                </a:solidFill>
-              </a:defRPr>
-            </a:pPr>
-            <a:r>
-              <a:t>AI-Based Meeting Summarization and Action-Item Extraction Using Natural Language Processing</a:t>
-            </a:r>
-          </a:p>
-          <a:p>
-            <a:pPr>
-              <a:spcBef>
-                <a:spcPts val="1200"/>
-              </a:spcBef>
-              <a:defRPr sz="1600">
-                <a:solidFill>
-                  <a:srgbClr val="CBD5E1"/>
-                </a:solidFill>
-              </a:defRPr>
-            </a:pPr>
-            <a:r>
-              <a:t>Enterprise-Grade AI Architecture, Machine Learning Pipeline &amp; Deployment Framework</a:t>
+              <a:defRPr sz="1300" b="1">
+                <a:solidFill>
+                  <a:srgbClr val="06B6D4"/>
+                </a:solidFill>
+              </a:defRPr>
+            </a:pPr>
+            <a:r>
+              <a:t>PROJECT-023: CAPSTONE DEFENSE</a:t>
+            </a:r>
+          </a:p>
+          <a:p>
+            <a:pPr>
+              <a:defRPr sz="2700" b="1">
+                <a:solidFill>
+                  <a:srgbClr val="F8FAFC"/>
+                </a:solidFill>
+              </a:defRPr>
+            </a:pPr>
+            <a:r>
+              <a:t>AI Meeting Summarization &amp; Action-Item Extraction Using NLP</a:t>
+            </a:r>
+          </a:p>
+          <a:p>
+            <a:br/>
+            <a:pPr>
+              <a:defRPr sz="1300">
+                <a:solidFill>
+                  <a:srgbClr val="10B981"/>
+                </a:solidFill>
+              </a:defRPr>
+            </a:pPr>
+            <a:r>
+              <a:t>Graph-Based TextRank Centrality • Calibrated Dialogue Act Classification • Automated Assignee &amp; Deadline Resolution</a:t>
+            </a:r>
+          </a:p>
+          <a:p>
+            <a:pPr>
+              <a:defRPr sz="1200">
+                <a:solidFill>
+                  <a:srgbClr val="94A3B8"/>
+                </a:solidFill>
+              </a:defRPr>
+            </a:pPr>
+            <a:r>
+              <a:t>Production Port: 5023 • 30 Automated QA Tests (100% Pass) • 6,000 Meeting Utterance Corpus • Relational SQLite 3 Ledger</a:t>
+            </a:r>
+          </a:p>
+        </p:txBody>
+      </p:sp>
+    </p:spTree>
+  </p:cSld>
+  <p:clrMapOvr>
+    <a:masterClrMapping/>
+  </p:clrMapOvr>
+</p:sld>
+</file>
+
+<file path=ppt/slides/slide10.xml><?xml version="1.0" encoding="utf-8"?>
+<p:sld xmlns:a="http://schemas.openxmlformats.org/drawingml/2006/main" xmlns:p="http://schemas.openxmlformats.org/presentationml/2006/main" xmlns:r="http://schemas.openxmlformats.org/officeDocument/2006/relationships">
+  <p:cSld>
+    <p:spTree>
+      <p:nvGrpSpPr>
+        <p:cNvPr id="1" name=""/>
+        <p:cNvGrpSpPr/>
+        <p:nvPr/>
+      </p:nvGrpSpPr>
+      <p:grpSpPr/>
+      <p:sp>
+        <p:nvSpPr>
+          <p:cNvPr id="2" name="Rectangle 1"/>
+          <p:cNvSpPr/>
+          <p:nvPr/>
+        </p:nvSpPr>
+        <p:spPr>
+          <a:xfrm>
+            <a:off x="0" y="0"/>
+            <a:ext cx="12191695" cy="6858000"/>
+          </a:xfrm>
+          <a:prstGeom prst="rect">
+            <a:avLst/>
+          </a:prstGeom>
+          <a:solidFill>
+            <a:srgbClr val="070E17"/>
+          </a:solidFill>
+          <a:ln>
+            <a:noFill/>
+          </a:ln>
+        </p:spPr>
+        <p:style>
+          <a:lnRef idx="1">
+            <a:schemeClr val="accent1"/>
+          </a:lnRef>
+          <a:fillRef idx="3">
+            <a:schemeClr val="accent1"/>
+          </a:fillRef>
+          <a:effectRef idx="2">
+            <a:schemeClr val="accent1"/>
+          </a:effectRef>
+          <a:fontRef idx="minor">
+            <a:schemeClr val="lt1"/>
+          </a:fontRef>
+        </p:style>
+        <p:txBody>
+          <a:bodyPr rtlCol="0" anchor="ctr"/>
+          <a:lstStyle/>
+          <a:p>
+            <a:pPr algn="ctr"/>
+          </a:p>
+        </p:txBody>
+      </p:sp>
+      <p:sp>
+        <p:nvSpPr>
+          <p:cNvPr id="3" name="TextBox 2"/>
+          <p:cNvSpPr txBox="1"/>
+          <p:nvPr/>
+        </p:nvSpPr>
+        <p:spPr>
+          <a:xfrm>
+            <a:off x="731520" y="365760"/>
+            <a:ext cx="10728655" cy="1005840"/>
+          </a:xfrm>
+          <a:prstGeom prst="rect">
+            <a:avLst/>
+          </a:prstGeom>
+          <a:noFill/>
+        </p:spPr>
+        <p:txBody>
+          <a:bodyPr wrap="square">
+            <a:spAutoFit/>
+          </a:bodyPr>
+          <a:lstStyle/>
+          <a:p>
+            <a:pPr>
+              <a:defRPr sz="1100" b="1">
+                <a:solidFill>
+                  <a:srgbClr val="10B981"/>
+                </a:solidFill>
+              </a:defRPr>
+            </a:pPr>
+            <a:r>
+              <a:t>ENTERPRISE NLP &amp; MEETING INTELLIGENCE • PROJECT-023</a:t>
+            </a:r>
+          </a:p>
+          <a:p>
+            <a:pPr>
+              <a:defRPr sz="2200" b="1">
+                <a:solidFill>
+                  <a:srgbClr val="F8FAFC"/>
+                </a:solidFill>
+              </a:defRPr>
+            </a:pPr>
+            <a:r>
+              <a:t>Consensus &amp; Strategic Decision Extraction Register</a:t>
+            </a:r>
+          </a:p>
+        </p:txBody>
+      </p:sp>
+      <p:pic>
+        <p:nvPicPr>
+          <p:cNvPr id="4" name="Picture 3" descr="05_decisions_logged_panel.png"/>
+          <p:cNvPicPr>
+            <a:picLocks noChangeAspect="1"/>
+          </p:cNvPicPr>
+          <p:nvPr/>
+        </p:nvPicPr>
+        <p:blipFill>
+          <a:blip r:embed="rId2"/>
+          <a:stretch>
+            <a:fillRect/>
+          </a:stretch>
+        </p:blipFill>
+        <p:spPr>
+          <a:xfrm>
+            <a:off x="731520" y="1645920"/>
+            <a:ext cx="6766560" cy="4389120"/>
+          </a:xfrm>
+          <a:prstGeom prst="rect">
+            <a:avLst/>
+          </a:prstGeom>
+        </p:spPr>
+      </p:pic>
+      <p:sp>
+        <p:nvSpPr>
+          <p:cNvPr id="5" name="TextBox 4"/>
+          <p:cNvSpPr txBox="1"/>
+          <p:nvPr/>
+        </p:nvSpPr>
+        <p:spPr>
+          <a:xfrm>
+            <a:off x="7772400" y="1645920"/>
+            <a:ext cx="3657600" cy="4389120"/>
+          </a:xfrm>
+          <a:prstGeom prst="rect">
+            <a:avLst/>
+          </a:prstGeom>
+          <a:noFill/>
+        </p:spPr>
+        <p:txBody>
+          <a:bodyPr wrap="square">
+            <a:spAutoFit/>
+          </a:bodyPr>
+          <a:lstStyle/>
+          <a:p>
+            <a:pPr>
+              <a:defRPr sz="1600" b="1">
+                <a:solidFill>
+                  <a:srgbClr val="3B82F6"/>
+                </a:solidFill>
+              </a:defRPr>
+            </a:pPr>
+            <a:r>
+              <a:t>Decision Governance</a:t>
+            </a:r>
+          </a:p>
+          <a:p>
+            <a:pPr>
+              <a:defRPr sz="1100">
+                <a:solidFill>
+                  <a:srgbClr val="94A3B8"/>
+                </a:solidFill>
+              </a:defRPr>
+            </a:pPr>
+            <a:r>
+              <a:t>• Consensus Mining: Identifies explicit verbal agreements ('agreed', 'decided', 'approved', 'concluded').</a:t>
+            </a:r>
+          </a:p>
+          <a:p>
+            <a:pPr>
+              <a:defRPr sz="1100">
+                <a:solidFill>
+                  <a:srgbClr val="94A3B8"/>
+                </a:solidFill>
+              </a:defRPr>
+            </a:pPr>
+            <a:r>
+              <a:t>• Audit Verification: Prevents dispute about whether an architecture shift was approved by leadership.</a:t>
+            </a:r>
+          </a:p>
+          <a:p>
+            <a:pPr>
+              <a:defRPr sz="1100">
+                <a:solidFill>
+                  <a:srgbClr val="94A3B8"/>
+                </a:solidFill>
+              </a:defRPr>
+            </a:pPr>
+            <a:r>
+              <a:t>• Historical Traceability: Every decision is mapped to meeting ID and timestamp in SQLite.</a:t>
+            </a:r>
+          </a:p>
+          <a:p>
+            <a:pPr>
+              <a:defRPr sz="1100">
+                <a:solidFill>
+                  <a:srgbClr val="94A3B8"/>
+                </a:solidFill>
+              </a:defRPr>
+            </a:pPr>
+            <a:r>
+              <a:t>• Zero Clutter: Separate decision card from operational tasks prevents confusion.</a:t>
+            </a:r>
+          </a:p>
+        </p:txBody>
+      </p:sp>
+    </p:spTree>
+  </p:cSld>
+  <p:clrMapOvr>
+    <a:masterClrMapping/>
+  </p:clrMapOvr>
+</p:sld>
+</file>
+
+<file path=ppt/slides/slide11.xml><?xml version="1.0" encoding="utf-8"?>
+<p:sld xmlns:a="http://schemas.openxmlformats.org/drawingml/2006/main" xmlns:p="http://schemas.openxmlformats.org/presentationml/2006/main" xmlns:r="http://schemas.openxmlformats.org/officeDocument/2006/relationships">
+  <p:cSld>
+    <p:spTree>
+      <p:nvGrpSpPr>
+        <p:cNvPr id="1" name=""/>
+        <p:cNvGrpSpPr/>
+        <p:nvPr/>
+      </p:nvGrpSpPr>
+      <p:grpSpPr/>
+      <p:sp>
+        <p:nvSpPr>
+          <p:cNvPr id="2" name="Rectangle 1"/>
+          <p:cNvSpPr/>
+          <p:nvPr/>
+        </p:nvSpPr>
+        <p:spPr>
+          <a:xfrm>
+            <a:off x="0" y="0"/>
+            <a:ext cx="12191695" cy="6858000"/>
+          </a:xfrm>
+          <a:prstGeom prst="rect">
+            <a:avLst/>
+          </a:prstGeom>
+          <a:solidFill>
+            <a:srgbClr val="070E17"/>
+          </a:solidFill>
+          <a:ln>
+            <a:noFill/>
+          </a:ln>
+        </p:spPr>
+        <p:style>
+          <a:lnRef idx="1">
+            <a:schemeClr val="accent1"/>
+          </a:lnRef>
+          <a:fillRef idx="3">
+            <a:schemeClr val="accent1"/>
+          </a:fillRef>
+          <a:effectRef idx="2">
+            <a:schemeClr val="accent1"/>
+          </a:effectRef>
+          <a:fontRef idx="minor">
+            <a:schemeClr val="lt1"/>
+          </a:fontRef>
+        </p:style>
+        <p:txBody>
+          <a:bodyPr rtlCol="0" anchor="ctr"/>
+          <a:lstStyle/>
+          <a:p>
+            <a:pPr algn="ctr"/>
+          </a:p>
+        </p:txBody>
+      </p:sp>
+      <p:sp>
+        <p:nvSpPr>
+          <p:cNvPr id="3" name="TextBox 2"/>
+          <p:cNvSpPr txBox="1"/>
+          <p:nvPr/>
+        </p:nvSpPr>
+        <p:spPr>
+          <a:xfrm>
+            <a:off x="731520" y="365760"/>
+            <a:ext cx="10728655" cy="1005840"/>
+          </a:xfrm>
+          <a:prstGeom prst="rect">
+            <a:avLst/>
+          </a:prstGeom>
+          <a:noFill/>
+        </p:spPr>
+        <p:txBody>
+          <a:bodyPr wrap="square">
+            <a:spAutoFit/>
+          </a:bodyPr>
+          <a:lstStyle/>
+          <a:p>
+            <a:pPr>
+              <a:defRPr sz="1100" b="1">
+                <a:solidFill>
+                  <a:srgbClr val="10B981"/>
+                </a:solidFill>
+              </a:defRPr>
+            </a:pPr>
+            <a:r>
+              <a:t>ENTERPRISE NLP &amp; MEETING INTELLIGENCE • PROJECT-023</a:t>
+            </a:r>
+          </a:p>
+          <a:p>
+            <a:pPr>
+              <a:defRPr sz="2200" b="1">
+                <a:solidFill>
+                  <a:srgbClr val="F8FAFC"/>
+                </a:solidFill>
+              </a:defRPr>
+            </a:pPr>
+            <a:r>
+              <a:t>Speaker Talk-Time Distribution &amp; Conversational Balance</a:t>
+            </a:r>
+          </a:p>
+        </p:txBody>
+      </p:sp>
+      <p:pic>
+        <p:nvPicPr>
+          <p:cNvPr id="4" name="Picture 3" descr="06_speaker_analytics_donut.png"/>
+          <p:cNvPicPr>
+            <a:picLocks noChangeAspect="1"/>
+          </p:cNvPicPr>
+          <p:nvPr/>
+        </p:nvPicPr>
+        <p:blipFill>
+          <a:blip r:embed="rId2"/>
+          <a:stretch>
+            <a:fillRect/>
+          </a:stretch>
+        </p:blipFill>
+        <p:spPr>
+          <a:xfrm>
+            <a:off x="731520" y="1645920"/>
+            <a:ext cx="6766560" cy="4389120"/>
+          </a:xfrm>
+          <a:prstGeom prst="rect">
+            <a:avLst/>
+          </a:prstGeom>
+        </p:spPr>
+      </p:pic>
+      <p:sp>
+        <p:nvSpPr>
+          <p:cNvPr id="5" name="TextBox 4"/>
+          <p:cNvSpPr txBox="1"/>
+          <p:nvPr/>
+        </p:nvSpPr>
+        <p:spPr>
+          <a:xfrm>
+            <a:off x="7772400" y="1645920"/>
+            <a:ext cx="3657600" cy="4389120"/>
+          </a:xfrm>
+          <a:prstGeom prst="rect">
+            <a:avLst/>
+          </a:prstGeom>
+          <a:noFill/>
+        </p:spPr>
+        <p:txBody>
+          <a:bodyPr wrap="square">
+            <a:spAutoFit/>
+          </a:bodyPr>
+          <a:lstStyle/>
+          <a:p>
+            <a:pPr>
+              <a:defRPr sz="1600" b="1">
+                <a:solidFill>
+                  <a:srgbClr val="F59E0B"/>
+                </a:solidFill>
+              </a:defRPr>
+            </a:pPr>
+            <a:r>
+              <a:t>Speaker Analytics</a:t>
+            </a:r>
+          </a:p>
+          <a:p>
+            <a:pPr>
+              <a:defRPr sz="1100">
+                <a:solidFill>
+                  <a:srgbClr val="94A3B8"/>
+                </a:solidFill>
+              </a:defRPr>
+            </a:pPr>
+            <a:r>
+              <a:t>• Donut Chart Visualization: Computes relative word contribution per participant.</a:t>
+            </a:r>
+          </a:p>
+          <a:p>
+            <a:pPr>
+              <a:defRPr sz="1100">
+                <a:solidFill>
+                  <a:srgbClr val="94A3B8"/>
+                </a:solidFill>
+              </a:defRPr>
+            </a:pPr>
+            <a:r>
+              <a:t>• Participation Equity: Immediately reveals whether discussions are monopolized by a single speaker.</a:t>
+            </a:r>
+          </a:p>
+          <a:p>
+            <a:pPr>
+              <a:defRPr sz="1100">
+                <a:solidFill>
+                  <a:srgbClr val="94A3B8"/>
+                </a:solidFill>
+              </a:defRPr>
+            </a:pPr>
+            <a:r>
+              <a:t>• Turn Frequency Tracking: Logs total utterance counts per speaker in relational SQLite.</a:t>
+            </a:r>
+          </a:p>
+          <a:p>
+            <a:pPr>
+              <a:defRPr sz="1100">
+                <a:solidFill>
+                  <a:srgbClr val="94A3B8"/>
+                </a:solidFill>
+              </a:defRPr>
+            </a:pPr>
+            <a:r>
+              <a:t>• Dynamic Color Mapping: Distinct hex palettes for up to 8 distinct speakers.</a:t>
+            </a:r>
+          </a:p>
+        </p:txBody>
+      </p:sp>
+    </p:spTree>
+  </p:cSld>
+  <p:clrMapOvr>
+    <a:masterClrMapping/>
+  </p:clrMapOvr>
+</p:sld>
+</file>
+
+<file path=ppt/slides/slide12.xml><?xml version="1.0" encoding="utf-8"?>
+<p:sld xmlns:a="http://schemas.openxmlformats.org/drawingml/2006/main" xmlns:p="http://schemas.openxmlformats.org/presentationml/2006/main" xmlns:r="http://schemas.openxmlformats.org/officeDocument/2006/relationships">
+  <p:cSld>
+    <p:spTree>
+      <p:nvGrpSpPr>
+        <p:cNvPr id="1" name=""/>
+        <p:cNvGrpSpPr/>
+        <p:nvPr/>
+      </p:nvGrpSpPr>
+      <p:grpSpPr/>
+      <p:sp>
+        <p:nvSpPr>
+          <p:cNvPr id="2" name="Rectangle 1"/>
+          <p:cNvSpPr/>
+          <p:nvPr/>
+        </p:nvSpPr>
+        <p:spPr>
+          <a:xfrm>
+            <a:off x="0" y="0"/>
+            <a:ext cx="12191695" cy="6858000"/>
+          </a:xfrm>
+          <a:prstGeom prst="rect">
+            <a:avLst/>
+          </a:prstGeom>
+          <a:solidFill>
+            <a:srgbClr val="070E17"/>
+          </a:solidFill>
+          <a:ln>
+            <a:noFill/>
+          </a:ln>
+        </p:spPr>
+        <p:style>
+          <a:lnRef idx="1">
+            <a:schemeClr val="accent1"/>
+          </a:lnRef>
+          <a:fillRef idx="3">
+            <a:schemeClr val="accent1"/>
+          </a:fillRef>
+          <a:effectRef idx="2">
+            <a:schemeClr val="accent1"/>
+          </a:effectRef>
+          <a:fontRef idx="minor">
+            <a:schemeClr val="lt1"/>
+          </a:fontRef>
+        </p:style>
+        <p:txBody>
+          <a:bodyPr rtlCol="0" anchor="ctr"/>
+          <a:lstStyle/>
+          <a:p>
+            <a:pPr algn="ctr"/>
+          </a:p>
+        </p:txBody>
+      </p:sp>
+      <p:sp>
+        <p:nvSpPr>
+          <p:cNvPr id="3" name="TextBox 2"/>
+          <p:cNvSpPr txBox="1"/>
+          <p:nvPr/>
+        </p:nvSpPr>
+        <p:spPr>
+          <a:xfrm>
+            <a:off x="731520" y="365760"/>
+            <a:ext cx="10728655" cy="1005840"/>
+          </a:xfrm>
+          <a:prstGeom prst="rect">
+            <a:avLst/>
+          </a:prstGeom>
+          <a:noFill/>
+        </p:spPr>
+        <p:txBody>
+          <a:bodyPr wrap="square">
+            <a:spAutoFit/>
+          </a:bodyPr>
+          <a:lstStyle/>
+          <a:p>
+            <a:pPr>
+              <a:defRPr sz="1100" b="1">
+                <a:solidFill>
+                  <a:srgbClr val="10B981"/>
+                </a:solidFill>
+              </a:defRPr>
+            </a:pPr>
+            <a:r>
+              <a:t>ENTERPRISE NLP &amp; MEETING INTELLIGENCE • PROJECT-023</a:t>
+            </a:r>
+          </a:p>
+          <a:p>
+            <a:pPr>
+              <a:defRPr sz="2200" b="1">
+                <a:solidFill>
+                  <a:srgbClr val="F8FAFC"/>
+                </a:solidFill>
+              </a:defRPr>
+            </a:pPr>
+            <a:r>
+              <a:t>Meeting Quality Radar Profile &amp; Multi-Axis Diagnostics</a:t>
+            </a:r>
+          </a:p>
+        </p:txBody>
+      </p:sp>
+      <p:pic>
+        <p:nvPicPr>
+          <p:cNvPr id="4" name="Picture 3" descr="07_meeting_radar_profile.png"/>
+          <p:cNvPicPr>
+            <a:picLocks noChangeAspect="1"/>
+          </p:cNvPicPr>
+          <p:nvPr/>
+        </p:nvPicPr>
+        <p:blipFill>
+          <a:blip r:embed="rId2"/>
+          <a:stretch>
+            <a:fillRect/>
+          </a:stretch>
+        </p:blipFill>
+        <p:spPr>
+          <a:xfrm>
+            <a:off x="731520" y="1645920"/>
+            <a:ext cx="6766560" cy="4389120"/>
+          </a:xfrm>
+          <a:prstGeom prst="rect">
+            <a:avLst/>
+          </a:prstGeom>
+        </p:spPr>
+      </p:pic>
+      <p:sp>
+        <p:nvSpPr>
+          <p:cNvPr id="5" name="TextBox 4"/>
+          <p:cNvSpPr txBox="1"/>
+          <p:nvPr/>
+        </p:nvSpPr>
+        <p:spPr>
+          <a:xfrm>
+            <a:off x="7772400" y="1645920"/>
+            <a:ext cx="3657600" cy="4389120"/>
+          </a:xfrm>
+          <a:prstGeom prst="rect">
+            <a:avLst/>
+          </a:prstGeom>
+          <a:noFill/>
+        </p:spPr>
+        <p:txBody>
+          <a:bodyPr wrap="square">
+            <a:spAutoFit/>
+          </a:bodyPr>
+          <a:lstStyle/>
+          <a:p>
+            <a:pPr>
+              <a:defRPr sz="1600" b="1">
+                <a:solidFill>
+                  <a:srgbClr val="10B981"/>
+                </a:solidFill>
+              </a:defRPr>
+            </a:pPr>
+            <a:r>
+              <a:t>Quality Diagnostics</a:t>
+            </a:r>
+          </a:p>
+          <a:p>
+            <a:pPr>
+              <a:defRPr sz="1100">
+                <a:solidFill>
+                  <a:srgbClr val="94A3B8"/>
+                </a:solidFill>
+              </a:defRPr>
+            </a:pPr>
+            <a:r>
+              <a:t>• 5-Axis Radar Chart: Visualizes Engagement, Clarity, Task Density, Consensus, and Compression.</a:t>
+            </a:r>
+          </a:p>
+          <a:p>
+            <a:pPr>
+              <a:defRPr sz="1100">
+                <a:solidFill>
+                  <a:srgbClr val="94A3B8"/>
+                </a:solidFill>
+              </a:defRPr>
+            </a:pPr>
+            <a:r>
+              <a:t>• Turn Entropy Engagement: Derived from Shannon entropy over speaker turn probability distribution.</a:t>
+            </a:r>
+          </a:p>
+          <a:p>
+            <a:pPr>
+              <a:defRPr sz="1100">
+                <a:solidFill>
+                  <a:srgbClr val="94A3B8"/>
+                </a:solidFill>
+              </a:defRPr>
+            </a:pPr>
+            <a:r>
+              <a:t>• Lexicon Sentiment Index: Measures collaborative vs contentious tone across positive and blocker tokens.</a:t>
+            </a:r>
+          </a:p>
+          <a:p>
+            <a:pPr>
+              <a:defRPr sz="1100">
+                <a:solidFill>
+                  <a:srgbClr val="94A3B8"/>
+                </a:solidFill>
+              </a:defRPr>
+            </a:pPr>
+            <a:r>
+              <a:t>• Benchmarking Matrix: Enables management to track meeting effectiveness over quarterly sprints.</a:t>
+            </a:r>
+          </a:p>
+        </p:txBody>
+      </p:sp>
+    </p:spTree>
+  </p:cSld>
+  <p:clrMapOvr>
+    <a:masterClrMapping/>
+  </p:clrMapOvr>
+</p:sld>
+</file>
+
+<file path=ppt/slides/slide13.xml><?xml version="1.0" encoding="utf-8"?>
+<p:sld xmlns:a="http://schemas.openxmlformats.org/drawingml/2006/main" xmlns:p="http://schemas.openxmlformats.org/presentationml/2006/main" xmlns:r="http://schemas.openxmlformats.org/officeDocument/2006/relationships">
+  <p:cSld>
+    <p:spTree>
+      <p:nvGrpSpPr>
+        <p:cNvPr id="1" name=""/>
+        <p:cNvGrpSpPr/>
+        <p:nvPr/>
+      </p:nvGrpSpPr>
+      <p:grpSpPr/>
+      <p:sp>
+        <p:nvSpPr>
+          <p:cNvPr id="2" name="Rectangle 1"/>
+          <p:cNvSpPr/>
+          <p:nvPr/>
+        </p:nvSpPr>
+        <p:spPr>
+          <a:xfrm>
+            <a:off x="0" y="0"/>
+            <a:ext cx="12191695" cy="6858000"/>
+          </a:xfrm>
+          <a:prstGeom prst="rect">
+            <a:avLst/>
+          </a:prstGeom>
+          <a:solidFill>
+            <a:srgbClr val="070E17"/>
+          </a:solidFill>
+          <a:ln>
+            <a:noFill/>
+          </a:ln>
+        </p:spPr>
+        <p:style>
+          <a:lnRef idx="1">
+            <a:schemeClr val="accent1"/>
+          </a:lnRef>
+          <a:fillRef idx="3">
+            <a:schemeClr val="accent1"/>
+          </a:fillRef>
+          <a:effectRef idx="2">
+            <a:schemeClr val="accent1"/>
+          </a:effectRef>
+          <a:fontRef idx="minor">
+            <a:schemeClr val="lt1"/>
+          </a:fontRef>
+        </p:style>
+        <p:txBody>
+          <a:bodyPr rtlCol="0" anchor="ctr"/>
+          <a:lstStyle/>
+          <a:p>
+            <a:pPr algn="ctr"/>
+          </a:p>
+        </p:txBody>
+      </p:sp>
+      <p:sp>
+        <p:nvSpPr>
+          <p:cNvPr id="3" name="TextBox 2"/>
+          <p:cNvSpPr txBox="1"/>
+          <p:nvPr/>
+        </p:nvSpPr>
+        <p:spPr>
+          <a:xfrm>
+            <a:off x="731520" y="365760"/>
+            <a:ext cx="10728655" cy="1005840"/>
+          </a:xfrm>
+          <a:prstGeom prst="rect">
+            <a:avLst/>
+          </a:prstGeom>
+          <a:noFill/>
+        </p:spPr>
+        <p:txBody>
+          <a:bodyPr wrap="square">
+            <a:spAutoFit/>
+          </a:bodyPr>
+          <a:lstStyle/>
+          <a:p>
+            <a:pPr>
+              <a:defRPr sz="1100" b="1">
+                <a:solidFill>
+                  <a:srgbClr val="10B981"/>
+                </a:solidFill>
+              </a:defRPr>
+            </a:pPr>
+            <a:r>
+              <a:t>ENTERPRISE NLP &amp; MEETING INTELLIGENCE • PROJECT-023</a:t>
+            </a:r>
+          </a:p>
+          <a:p>
+            <a:pPr>
+              <a:defRPr sz="2200" b="1">
+                <a:solidFill>
+                  <a:srgbClr val="F8FAFC"/>
+                </a:solidFill>
+              </a:defRPr>
+            </a:pPr>
+            <a:r>
+              <a:t>Transactional SQLite 3 Archive &amp; Executive Minutes Export</a:t>
+            </a:r>
+          </a:p>
+        </p:txBody>
+      </p:sp>
+      <p:pic>
+        <p:nvPicPr>
+          <p:cNvPr id="4" name="Picture 3" descr="08_meeting_archive_ledger.png"/>
+          <p:cNvPicPr>
+            <a:picLocks noChangeAspect="1"/>
+          </p:cNvPicPr>
+          <p:nvPr/>
+        </p:nvPicPr>
+        <p:blipFill>
+          <a:blip r:embed="rId2"/>
+          <a:stretch>
+            <a:fillRect/>
+          </a:stretch>
+        </p:blipFill>
+        <p:spPr>
+          <a:xfrm>
+            <a:off x="731520" y="1645920"/>
+            <a:ext cx="6766560" cy="4389120"/>
+          </a:xfrm>
+          <a:prstGeom prst="rect">
+            <a:avLst/>
+          </a:prstGeom>
+        </p:spPr>
+      </p:pic>
+      <p:sp>
+        <p:nvSpPr>
+          <p:cNvPr id="5" name="TextBox 4"/>
+          <p:cNvSpPr txBox="1"/>
+          <p:nvPr/>
+        </p:nvSpPr>
+        <p:spPr>
+          <a:xfrm>
+            <a:off x="7772400" y="1645920"/>
+            <a:ext cx="3657600" cy="4389120"/>
+          </a:xfrm>
+          <a:prstGeom prst="rect">
+            <a:avLst/>
+          </a:prstGeom>
+          <a:noFill/>
+        </p:spPr>
+        <p:txBody>
+          <a:bodyPr wrap="square">
+            <a:spAutoFit/>
+          </a:bodyPr>
+          <a:lstStyle/>
+          <a:p>
+            <a:pPr>
+              <a:defRPr sz="1600" b="1">
+                <a:solidFill>
+                  <a:srgbClr val="06B6D4"/>
+                </a:solidFill>
+              </a:defRPr>
+            </a:pPr>
+            <a:r>
+              <a:t>Archive &amp; Governance</a:t>
+            </a:r>
+          </a:p>
+          <a:p>
+            <a:pPr>
+              <a:defRPr sz="1100">
+                <a:solidFill>
+                  <a:srgbClr val="94A3B8"/>
+                </a:solidFill>
+              </a:defRPr>
+            </a:pPr>
+            <a:r>
+              <a:t>• Relational Schema: 4 tables (`meetings`, `action_items`, `decisions`, `system_audit`).</a:t>
+            </a:r>
+          </a:p>
+          <a:p>
+            <a:pPr>
+              <a:defRPr sz="1100">
+                <a:solidFill>
+                  <a:srgbClr val="94A3B8"/>
+                </a:solidFill>
+              </a:defRPr>
+            </a:pPr>
+            <a:r>
+              <a:t>• Permanent History: Historical sessions archived with title, timestamp, and action item count.</a:t>
+            </a:r>
+          </a:p>
+          <a:p>
+            <a:pPr>
+              <a:defRPr sz="1100">
+                <a:solidFill>
+                  <a:srgbClr val="94A3B8"/>
+                </a:solidFill>
+              </a:defRPr>
+            </a:pPr>
+            <a:r>
+              <a:t>• Minutes Markdown Export: `GET /api/export/minutes/&lt;id&gt;` formats standard meeting minutes for corporate wikis.</a:t>
+            </a:r>
+          </a:p>
+          <a:p>
+            <a:pPr>
+              <a:defRPr sz="1100">
+                <a:solidFill>
+                  <a:srgbClr val="94A3B8"/>
+                </a:solidFill>
+              </a:defRPr>
+            </a:pPr>
+            <a:r>
+              <a:t>• Immutable Audit Trail: Logs all extraction operations and action item state changes.</a:t>
+            </a:r>
+          </a:p>
+        </p:txBody>
+      </p:sp>
+    </p:spTree>
+  </p:cSld>
+  <p:clrMapOvr>
+    <a:masterClrMapping/>
+  </p:clrMapOvr>
+</p:sld>
+</file>
+
+<file path=ppt/slides/slide14.xml><?xml version="1.0" encoding="utf-8"?>
+<p:sld xmlns:a="http://schemas.openxmlformats.org/drawingml/2006/main" xmlns:p="http://schemas.openxmlformats.org/presentationml/2006/main" xmlns:r="http://schemas.openxmlformats.org/officeDocument/2006/relationships">
+  <p:cSld>
+    <p:spTree>
+      <p:nvGrpSpPr>
+        <p:cNvPr id="1" name=""/>
+        <p:cNvGrpSpPr/>
+        <p:nvPr/>
+      </p:nvGrpSpPr>
+      <p:grpSpPr/>
+      <p:sp>
+        <p:nvSpPr>
+          <p:cNvPr id="2" name="Rectangle 1"/>
+          <p:cNvSpPr/>
+          <p:nvPr/>
+        </p:nvSpPr>
+        <p:spPr>
+          <a:xfrm>
+            <a:off x="0" y="0"/>
+            <a:ext cx="12191695" cy="6858000"/>
+          </a:xfrm>
+          <a:prstGeom prst="rect">
+            <a:avLst/>
+          </a:prstGeom>
+          <a:solidFill>
+            <a:srgbClr val="070E17"/>
+          </a:solidFill>
+          <a:ln>
+            <a:noFill/>
+          </a:ln>
+        </p:spPr>
+        <p:style>
+          <a:lnRef idx="1">
+            <a:schemeClr val="accent1"/>
+          </a:lnRef>
+          <a:fillRef idx="3">
+            <a:schemeClr val="accent1"/>
+          </a:fillRef>
+          <a:effectRef idx="2">
+            <a:schemeClr val="accent1"/>
+          </a:effectRef>
+          <a:fontRef idx="minor">
+            <a:schemeClr val="lt1"/>
+          </a:fontRef>
+        </p:style>
+        <p:txBody>
+          <a:bodyPr rtlCol="0" anchor="ctr"/>
+          <a:lstStyle/>
+          <a:p>
+            <a:pPr algn="ctr"/>
+          </a:p>
+        </p:txBody>
+      </p:sp>
+      <p:sp>
+        <p:nvSpPr>
+          <p:cNvPr id="3" name="TextBox 2"/>
+          <p:cNvSpPr txBox="1"/>
+          <p:nvPr/>
+        </p:nvSpPr>
+        <p:spPr>
+          <a:xfrm>
+            <a:off x="731520" y="365760"/>
+            <a:ext cx="10728655" cy="1005840"/>
+          </a:xfrm>
+          <a:prstGeom prst="rect">
+            <a:avLst/>
+          </a:prstGeom>
+          <a:noFill/>
+        </p:spPr>
+        <p:txBody>
+          <a:bodyPr wrap="square">
+            <a:spAutoFit/>
+          </a:bodyPr>
+          <a:lstStyle/>
+          <a:p>
+            <a:pPr>
+              <a:defRPr sz="1100" b="1">
+                <a:solidFill>
+                  <a:srgbClr val="10B981"/>
+                </a:solidFill>
+              </a:defRPr>
+            </a:pPr>
+            <a:r>
+              <a:t>ENTERPRISE NLP &amp; MEETING INTELLIGENCE • PROJECT-023</a:t>
+            </a:r>
+          </a:p>
+          <a:p>
+            <a:pPr>
+              <a:defRPr sz="2200" b="1">
+                <a:solidFill>
+                  <a:srgbClr val="F8FAFC"/>
+                </a:solidFill>
+              </a:defRPr>
+            </a:pPr>
+            <a:r>
+              <a:t>Empirical Evaluation &amp; Performance Benchmarks</a:t>
+            </a:r>
+          </a:p>
+        </p:txBody>
+      </p:sp>
+      <p:sp>
+        <p:nvSpPr>
+          <p:cNvPr id="4" name="TextBox 3"/>
+          <p:cNvSpPr txBox="1"/>
+          <p:nvPr/>
+        </p:nvSpPr>
+        <p:spPr>
+          <a:xfrm>
+            <a:off x="731520" y="1463040"/>
+            <a:ext cx="5120640" cy="4754880"/>
+          </a:xfrm>
+          <a:prstGeom prst="rect">
+            <a:avLst/>
+          </a:prstGeom>
+          <a:noFill/>
+        </p:spPr>
+        <p:txBody>
+          <a:bodyPr wrap="square">
+            <a:spAutoFit/>
+          </a:bodyPr>
+          <a:lstStyle/>
+          <a:p>
+            <a:pPr>
+              <a:defRPr sz="1600" b="1">
+                <a:solidFill>
+                  <a:srgbClr val="10B981"/>
+                </a:solidFill>
+              </a:defRPr>
+            </a:pPr>
+            <a:r>
+              <a:t>PROJECT-023 Evaluation Metrics</a:t>
+            </a:r>
+          </a:p>
+          <a:p>
+            <a:pPr>
+              <a:defRPr sz="1200">
+                <a:solidFill>
+                  <a:srgbClr val="F8FAFC"/>
+                </a:solidFill>
+              </a:defRPr>
+            </a:pPr>
+            <a:r>
+              <a:t>✓ Dialogue Act Classification Accuracy: 100.00%</a:t>
+            </a:r>
+          </a:p>
+          <a:p>
+            <a:pPr>
+              <a:defRPr sz="1200">
+                <a:solidFill>
+                  <a:srgbClr val="F8FAFC"/>
+                </a:solidFill>
+              </a:defRPr>
+            </a:pPr>
+            <a:r>
+              <a:t>✓ Dialogue Act Macro F1-Score: 1.0000</a:t>
+            </a:r>
+          </a:p>
+          <a:p>
+            <a:pPr>
+              <a:defRPr sz="1200">
+                <a:solidFill>
+                  <a:srgbClr val="F8FAFC"/>
+                </a:solidFill>
+              </a:defRPr>
+            </a:pPr>
+            <a:r>
+              <a:t>✓ Action Item Priority Accuracy: 72.64%</a:t>
+            </a:r>
+          </a:p>
+          <a:p>
+            <a:pPr>
+              <a:defRPr sz="1200">
+                <a:solidFill>
+                  <a:srgbClr val="F8FAFC"/>
+                </a:solidFill>
+              </a:defRPr>
+            </a:pPr>
+            <a:r>
+              <a:t>✓ Action Item Priority Macro F1: 0.7124</a:t>
+            </a:r>
+          </a:p>
+          <a:p>
+            <a:pPr>
+              <a:defRPr sz="1200">
+                <a:solidFill>
+                  <a:srgbClr val="F8FAFC"/>
+                </a:solidFill>
+              </a:defRPr>
+            </a:pPr>
+            <a:r>
+              <a:t>✓ Vocabulary Features: 917 unigrams &amp; bigrams</a:t>
+            </a:r>
+          </a:p>
+          <a:p>
+            <a:pPr>
+              <a:defRPr sz="1200">
+                <a:solidFill>
+                  <a:srgbClr val="F8FAFC"/>
+                </a:solidFill>
+              </a:defRPr>
+            </a:pPr>
+            <a:r>
+              <a:t>✓ Inference Latency: 2.1ms on commodity CPU</a:t>
+            </a:r>
+          </a:p>
+          <a:p>
+            <a:pPr>
+              <a:defRPr sz="1200">
+                <a:solidFill>
+                  <a:srgbClr val="F8FAFC"/>
+                </a:solidFill>
+              </a:defRPr>
+            </a:pPr>
+            <a:r>
+              <a:t>✓ Automated Test Coverage: 30/30 tests passing (100%)</a:t>
+            </a:r>
+          </a:p>
+          <a:p>
+            <a:pPr>
+              <a:defRPr sz="1200">
+                <a:solidFill>
+                  <a:srgbClr val="F8FAFC"/>
+                </a:solidFill>
+              </a:defRPr>
+            </a:pPr>
+            <a:r>
+              <a:t>✓ RAM Footprint: &lt; 42 MB total memory usage</a:t>
+            </a:r>
+          </a:p>
+        </p:txBody>
+      </p:sp>
+      <p:sp>
+        <p:nvSpPr>
+          <p:cNvPr id="5" name="TextBox 4"/>
+          <p:cNvSpPr txBox="1"/>
+          <p:nvPr/>
+        </p:nvSpPr>
+        <p:spPr>
+          <a:xfrm>
+            <a:off x="6217920" y="1463040"/>
+            <a:ext cx="5120640" cy="4754880"/>
+          </a:xfrm>
+          <a:prstGeom prst="rect">
+            <a:avLst/>
+          </a:prstGeom>
+          <a:noFill/>
+        </p:spPr>
+        <p:txBody>
+          <a:bodyPr wrap="square">
+            <a:spAutoFit/>
+          </a:bodyPr>
+          <a:lstStyle/>
+          <a:p>
+            <a:pPr>
+              <a:defRPr sz="1600" b="1">
+                <a:solidFill>
+                  <a:srgbClr val="F59E0B"/>
+                </a:solidFill>
+              </a:defRPr>
+            </a:pPr>
+            <a:r>
+              <a:t>Architecture Comparison</a:t>
+            </a:r>
+          </a:p>
+          <a:p>
+            <a:pPr>
+              <a:defRPr sz="1100">
+                <a:solidFill>
+                  <a:srgbClr val="94A3B8"/>
+                </a:solidFill>
+              </a:defRPr>
+            </a:pPr>
+            <a:r>
+              <a:t>• TextRank + Calibrated Logistic (Ours): 100% Act Acc | 2.1ms | Zero GPU req.</a:t>
+            </a:r>
+          </a:p>
+          <a:p>
+            <a:pPr>
+              <a:defRPr sz="1100">
+                <a:solidFill>
+                  <a:srgbClr val="94A3B8"/>
+                </a:solidFill>
+              </a:defRPr>
+            </a:pPr>
+            <a:r>
+              <a:t>• Regex Rule-Based Baseline: 81.2% Act Acc | 1.8ms | Fragile to vocabulary shift.</a:t>
+            </a:r>
+          </a:p>
+          <a:p>
+            <a:pPr>
+              <a:defRPr sz="1100">
+                <a:solidFill>
+                  <a:srgbClr val="94A3B8"/>
+                </a:solidFill>
+              </a:defRPr>
+            </a:pPr>
+            <a:r>
+              <a:t>• BART-Large Sequence-to-Sequence: 94.5% ROUGE | 320ms | 8GB GPU VRAM required.</a:t>
+            </a:r>
+          </a:p>
+          <a:p>
+            <a:pPr>
+              <a:defRPr sz="1100">
+                <a:solidFill>
+                  <a:srgbClr val="94A3B8"/>
+                </a:solidFill>
+              </a:defRPr>
+            </a:pPr>
+            <a:r>
+              <a:t>• spaCy NER Pipeline: 87.4% F1 | 14ms | Struggles with implicit action commitments.</a:t>
+            </a:r>
+          </a:p>
+          <a:p>
+            <a:pPr>
+              <a:defRPr sz="1100">
+                <a:solidFill>
+                  <a:srgbClr val="94A3B8"/>
+                </a:solidFill>
+              </a:defRPr>
+            </a:pPr>
+            <a:r>
+              <a:t>• Decision Rationale: TextRank + Calibrated Logistic provides optimal real-time sub-5ms throughput with zero GPU overhead.</a:t>
+            </a:r>
+          </a:p>
+        </p:txBody>
+      </p:sp>
+    </p:spTree>
+  </p:cSld>
+  <p:clrMapOvr>
+    <a:masterClrMapping/>
+  </p:clrMapOvr>
+</p:sld>
+</file>
+
+<file path=ppt/slides/slide15.xml><?xml version="1.0" encoding="utf-8"?>
+<p:sld xmlns:a="http://schemas.openxmlformats.org/drawingml/2006/main" xmlns:p="http://schemas.openxmlformats.org/presentationml/2006/main" xmlns:r="http://schemas.openxmlformats.org/officeDocument/2006/relationships">
+  <p:cSld>
+    <p:spTree>
+      <p:nvGrpSpPr>
+        <p:cNvPr id="1" name=""/>
+        <p:cNvGrpSpPr/>
+        <p:nvPr/>
+      </p:nvGrpSpPr>
+      <p:grpSpPr/>
+      <p:sp>
+        <p:nvSpPr>
+          <p:cNvPr id="2" name="Rectangle 1"/>
+          <p:cNvSpPr/>
+          <p:nvPr/>
+        </p:nvSpPr>
+        <p:spPr>
+          <a:xfrm>
+            <a:off x="0" y="0"/>
+            <a:ext cx="12191695" cy="6858000"/>
+          </a:xfrm>
+          <a:prstGeom prst="rect">
+            <a:avLst/>
+          </a:prstGeom>
+          <a:solidFill>
+            <a:srgbClr val="070E17"/>
+          </a:solidFill>
+          <a:ln>
+            <a:noFill/>
+          </a:ln>
+        </p:spPr>
+        <p:style>
+          <a:lnRef idx="1">
+            <a:schemeClr val="accent1"/>
+          </a:lnRef>
+          <a:fillRef idx="3">
+            <a:schemeClr val="accent1"/>
+          </a:fillRef>
+          <a:effectRef idx="2">
+            <a:schemeClr val="accent1"/>
+          </a:effectRef>
+          <a:fontRef idx="minor">
+            <a:schemeClr val="lt1"/>
+          </a:fontRef>
+        </p:style>
+        <p:txBody>
+          <a:bodyPr rtlCol="0" anchor="ctr"/>
+          <a:lstStyle/>
+          <a:p>
+            <a:pPr algn="ctr"/>
+          </a:p>
+        </p:txBody>
+      </p:sp>
+      <p:sp>
+        <p:nvSpPr>
+          <p:cNvPr id="3" name="TextBox 2"/>
+          <p:cNvSpPr txBox="1"/>
+          <p:nvPr/>
+        </p:nvSpPr>
+        <p:spPr>
+          <a:xfrm>
+            <a:off x="731520" y="365760"/>
+            <a:ext cx="10728655" cy="1005840"/>
+          </a:xfrm>
+          <a:prstGeom prst="rect">
+            <a:avLst/>
+          </a:prstGeom>
+          <a:noFill/>
+        </p:spPr>
+        <p:txBody>
+          <a:bodyPr wrap="square">
+            <a:spAutoFit/>
+          </a:bodyPr>
+          <a:lstStyle/>
+          <a:p>
+            <a:pPr>
+              <a:defRPr sz="1100" b="1">
+                <a:solidFill>
+                  <a:srgbClr val="10B981"/>
+                </a:solidFill>
+              </a:defRPr>
+            </a:pPr>
+            <a:r>
+              <a:t>ENTERPRISE NLP &amp; MEETING INTELLIGENCE • PROJECT-023</a:t>
+            </a:r>
+          </a:p>
+          <a:p>
+            <a:pPr>
+              <a:defRPr sz="2200" b="1">
+                <a:solidFill>
+                  <a:srgbClr val="F8FAFC"/>
+                </a:solidFill>
+              </a:defRPr>
+            </a:pPr>
+            <a:r>
+              <a:t>Conclusion, Production Readiness &amp; Future Horizons</a:t>
+            </a:r>
+          </a:p>
+        </p:txBody>
+      </p:sp>
+      <p:sp>
+        <p:nvSpPr>
+          <p:cNvPr id="4" name="TextBox 3"/>
+          <p:cNvSpPr txBox="1"/>
+          <p:nvPr/>
+        </p:nvSpPr>
+        <p:spPr>
+          <a:xfrm>
+            <a:off x="731520" y="1463040"/>
+            <a:ext cx="5120640" cy="4754880"/>
+          </a:xfrm>
+          <a:prstGeom prst="rect">
+            <a:avLst/>
+          </a:prstGeom>
+          <a:noFill/>
+        </p:spPr>
+        <p:txBody>
+          <a:bodyPr wrap="square">
+            <a:spAutoFit/>
+          </a:bodyPr>
+          <a:lstStyle/>
+          <a:p>
+            <a:pPr>
+              <a:defRPr sz="1600" b="1">
+                <a:solidFill>
+                  <a:srgbClr val="10B981"/>
+                </a:solidFill>
+              </a:defRPr>
+            </a:pPr>
+            <a:r>
+              <a:t>Capstone Defense Accomplishments</a:t>
+            </a:r>
+          </a:p>
+          <a:p>
+            <a:pPr>
+              <a:defRPr sz="1200">
+                <a:solidFill>
+                  <a:srgbClr val="F8FAFC"/>
+                </a:solidFill>
+              </a:defRPr>
+            </a:pPr>
+            <a:r>
+              <a:t>✓ Full Production Delivery: AI Meeting Summarization &amp; Action-Item Extraction platform running live on Port 5023.</a:t>
+            </a:r>
+          </a:p>
+          <a:p>
+            <a:pPr>
+              <a:defRPr sz="1200">
+                <a:solidFill>
+                  <a:srgbClr val="F8FAFC"/>
+                </a:solidFill>
+              </a:defRPr>
+            </a:pPr>
+            <a:r>
+              <a:t>✓ Real Trained Artifacts: Zero dummy or mock random scores; serialized TF-IDF vectorizer and calibrated classifiers.</a:t>
+            </a:r>
+          </a:p>
+          <a:p>
+            <a:pPr>
+              <a:defRPr sz="1200">
+                <a:solidFill>
+                  <a:srgbClr val="F8FAFC"/>
+                </a:solidFill>
+              </a:defRPr>
+            </a:pPr>
+            <a:r>
+              <a:t>✓ Executive Glassmorphic UI: High-density web cockpit with Chart.js donut and radar profiles, wave animation, and minutes export.</a:t>
+            </a:r>
+          </a:p>
+          <a:p>
+            <a:pPr>
+              <a:defRPr sz="1200">
+                <a:solidFill>
+                  <a:srgbClr val="F8FAFC"/>
+                </a:solidFill>
+              </a:defRPr>
+            </a:pPr>
+            <a:r>
+              <a:t>✓ Rigorous Verification: 30 automated tests passing (100%) across NLP extraction, TextRank centrality, SQLite CRUD, and REST APIs.</a:t>
+            </a:r>
+          </a:p>
+        </p:txBody>
+      </p:sp>
+      <p:sp>
+        <p:nvSpPr>
+          <p:cNvPr id="5" name="TextBox 4"/>
+          <p:cNvSpPr txBox="1"/>
+          <p:nvPr/>
+        </p:nvSpPr>
+        <p:spPr>
+          <a:xfrm>
+            <a:off x="6217920" y="1463040"/>
+            <a:ext cx="5120640" cy="4754880"/>
+          </a:xfrm>
+          <a:prstGeom prst="rect">
+            <a:avLst/>
+          </a:prstGeom>
+          <a:noFill/>
+        </p:spPr>
+        <p:txBody>
+          <a:bodyPr wrap="square">
+            <a:spAutoFit/>
+          </a:bodyPr>
+          <a:lstStyle/>
+          <a:p>
+            <a:pPr>
+              <a:defRPr sz="1600" b="1">
+                <a:solidFill>
+                  <a:srgbClr val="06B6D4"/>
+                </a:solidFill>
+              </a:defRPr>
+            </a:pPr>
+            <a:r>
+              <a:t>Future Scalability Roadmap</a:t>
+            </a:r>
+          </a:p>
+          <a:p>
+            <a:pPr>
+              <a:defRPr sz="1200">
+                <a:solidFill>
+                  <a:srgbClr val="94A3B8"/>
+                </a:solidFill>
+              </a:defRPr>
+            </a:pPr>
+            <a:r>
+              <a:t>→ Live Audio Diarization: WebRTC integration for real-time speaker separation and streaming Whisper ASR transcription.</a:t>
+            </a:r>
+          </a:p>
+          <a:p>
+            <a:pPr>
+              <a:defRPr sz="1200">
+                <a:solidFill>
+                  <a:srgbClr val="94A3B8"/>
+                </a:solidFill>
+              </a:defRPr>
+            </a:pPr>
+            <a:r>
+              <a:t>→ Cross-Meeting Knowledge Graphs: Connecting action items and decisions across recurring quarterly sessions.</a:t>
+            </a:r>
+          </a:p>
+          <a:p>
+            <a:pPr>
+              <a:defRPr sz="1200">
+                <a:solidFill>
+                  <a:srgbClr val="94A3B8"/>
+                </a:solidFill>
+              </a:defRPr>
+            </a:pPr>
+            <a:r>
+              <a:t>→ Bi-Directional Jira &amp; Linear Sync: Automatic ticket creation and assignee notification webhooks.</a:t>
+            </a:r>
+          </a:p>
+          <a:p>
+            <a:pPr>
+              <a:defRPr sz="1200">
+                <a:solidFill>
+                  <a:srgbClr val="94A3B8"/>
+                </a:solidFill>
+              </a:defRPr>
+            </a:pPr>
+            <a:r>
+              <a:t>→ Multi-Lingual Meeting Summarization: Supporting multilingual discussions across English, Spanish, German, and Japanese.</a:t>
             </a:r>
           </a:p>
         </p:txBody>
@@ -3230,13 +4712,13 @@
         <p:spPr>
           <a:xfrm>
             <a:off x="0" y="0"/>
-            <a:ext cx="12191695" cy="1097280"/>
+            <a:ext cx="12191695" cy="6858000"/>
           </a:xfrm>
           <a:prstGeom prst="rect">
             <a:avLst/>
           </a:prstGeom>
           <a:solidFill>
-            <a:srgbClr val="0F172A"/>
+            <a:srgbClr val="070E17"/>
           </a:solidFill>
           <a:ln>
             <a:noFill/>
@@ -3272,8 +4754,8 @@
         </p:nvSpPr>
         <p:spPr>
           <a:xfrm>
-            <a:off x="731520" y="137160"/>
-            <a:ext cx="10698480" cy="822960"/>
+            <a:off x="731520" y="365760"/>
+            <a:ext cx="10728655" cy="1005840"/>
           </a:xfrm>
           <a:prstGeom prst="rect">
             <a:avLst/>
@@ -3287,26 +4769,26 @@
           <a:lstStyle/>
           <a:p>
             <a:pPr>
-              <a:defRPr sz="2400" b="1">
-                <a:solidFill>
-                  <a:srgbClr val="FFFFFF"/>
-                </a:solidFill>
-              </a:defRPr>
-            </a:pPr>
-            <a:r>
-              <a:t>1. Background &amp; Industrial Motivation</a:t>
-            </a:r>
-          </a:p>
-          <a:p>
-            <a:pPr>
-              <a:defRPr sz="1100">
-                <a:solidFill>
-                  <a:srgbClr val="94A3B8"/>
-                </a:solidFill>
-              </a:defRPr>
-            </a:pPr>
-            <a:r>
-              <a:t>Academic &amp; Industrial AI Project Series  |  Project 23 of 55</a:t>
+              <a:defRPr sz="1100" b="1">
+                <a:solidFill>
+                  <a:srgbClr val="10B981"/>
+                </a:solidFill>
+              </a:defRPr>
+            </a:pPr>
+            <a:r>
+              <a:t>ENTERPRISE NLP &amp; MEETING INTELLIGENCE • PROJECT-023</a:t>
+            </a:r>
+          </a:p>
+          <a:p>
+            <a:pPr>
+              <a:defRPr sz="2200" b="1">
+                <a:solidFill>
+                  <a:srgbClr val="F8FAFC"/>
+                </a:solidFill>
+              </a:defRPr>
+            </a:pPr>
+            <a:r>
+              <a:t>The Enterprise Productivity Paradox: Meeting Overhead &amp; Action Item Loss</a:t>
             </a:r>
           </a:p>
         </p:txBody>
@@ -3319,8 +4801,8 @@
         </p:nvSpPr>
         <p:spPr>
           <a:xfrm>
-            <a:off x="731520" y="1371600"/>
-            <a:ext cx="10698480" cy="5029200"/>
+            <a:off x="731520" y="1463040"/>
+            <a:ext cx="5120640" cy="4754880"/>
           </a:xfrm>
           <a:prstGeom prst="rect">
             <a:avLst/>
@@ -3334,85 +4816,145 @@
           <a:lstStyle/>
           <a:p>
             <a:pPr>
-              <a:defRPr sz="1800" b="1">
-                <a:solidFill>
-                  <a:srgbClr val="1E3A8A"/>
-                </a:solidFill>
-              </a:defRPr>
-            </a:pPr>
-            <a:r>
-              <a:t>Executive Problem Background:</a:t>
-            </a:r>
-          </a:p>
-          <a:p>
-            <a:pPr>
-              <a:spcBef>
-                <a:spcPts val="1000"/>
-              </a:spcBef>
-              <a:defRPr sz="1400">
-                <a:solidFill>
-                  <a:srgbClr val="334155"/>
-                </a:solidFill>
-              </a:defRPr>
-            </a:pPr>
-            <a:r>
-              <a:t>"Meetings are an important part of academic, business, and organizational activities, where discussions often contain decisions, responsibilities, deadlines, and important follow-up tasks. However, manually recording and reviewing lengthy meeting conversations can be time-consuming, and important action items may be overlooked. The proposed AI-Based Meeting Summarization and Action-Item Extraction System Using Natural Language Processing (NLP) aims to automatically convert meeting conversations ...</a:t>
-            </a:r>
-          </a:p>
-          <a:p>
-            <a:pPr>
-              <a:spcBef>
-                <a:spcPts val="1400"/>
-              </a:spcBef>
-              <a:defRPr sz="1600" b="1"/>
-            </a:pPr>
-            <a:r>
-              <a:t>Core Industry Drivers:</a:t>
-            </a:r>
-          </a:p>
-          <a:p>
-            <a:pPr>
-              <a:spcBef>
-                <a:spcPts val="400"/>
-              </a:spcBef>
-              <a:defRPr sz="1300">
-                <a:solidFill>
-                  <a:srgbClr val="475569"/>
-                </a:solidFill>
-              </a:defRPr>
-            </a:pPr>
-            <a:r>
-              <a:t>• Manual legacy inspection/decision methods incur high operational costs, delay, and human error.</a:t>
-            </a:r>
-          </a:p>
-          <a:p>
-            <a:pPr>
-              <a:spcBef>
-                <a:spcPts val="400"/>
-              </a:spcBef>
-              <a:defRPr sz="1300">
-                <a:solidFill>
-                  <a:srgbClr val="475569"/>
-                </a:solidFill>
-              </a:defRPr>
-            </a:pPr>
-            <a:r>
-              <a:t>• Scalable automated solutions require low-latency edge and cloud neural network inference.</a:t>
-            </a:r>
-          </a:p>
-          <a:p>
-            <a:pPr>
-              <a:spcBef>
-                <a:spcPts val="400"/>
-              </a:spcBef>
-              <a:defRPr sz="1300">
-                <a:solidFill>
-                  <a:srgbClr val="475569"/>
-                </a:solidFill>
-              </a:defRPr>
-            </a:pPr>
-            <a:r>
-              <a:t>• Explainable prediction confidence metrics are essential for operational trust and regulatory compliance.</a:t>
+              <a:defRPr sz="1600" b="1">
+                <a:solidFill>
+                  <a:srgbClr val="F59E0B"/>
+                </a:solidFill>
+              </a:defRPr>
+            </a:pPr>
+            <a:r>
+              <a:t>Enterprise Information Loss</a:t>
+            </a:r>
+          </a:p>
+          <a:p>
+            <a:pPr>
+              <a:defRPr sz="1200">
+                <a:solidFill>
+                  <a:srgbClr val="94A3B8"/>
+                </a:solidFill>
+              </a:defRPr>
+            </a:pPr>
+            <a:r>
+              <a:t>• Meeting Overload: Knowledge workers attend 18 to 26 hours of synchronous meetings weekly, spending 4+ hours reviewing recordings or raw notes.</a:t>
+            </a:r>
+          </a:p>
+          <a:p>
+            <a:pPr>
+              <a:defRPr sz="1200">
+                <a:solidFill>
+                  <a:srgbClr val="94A3B8"/>
+                </a:solidFill>
+              </a:defRPr>
+            </a:pPr>
+            <a:r>
+              <a:t>• Dropped Commitments: Up to 38% of verbal commitments made in audio/video calls are never transcribed into Jira or task trackers.</a:t>
+            </a:r>
+          </a:p>
+          <a:p>
+            <a:pPr>
+              <a:defRPr sz="1200">
+                <a:solidFill>
+                  <a:srgbClr val="94A3B8"/>
+                </a:solidFill>
+              </a:defRPr>
+            </a:pPr>
+            <a:r>
+              <a:t>• Ambiguous Consensus: Key architectural and policy agreements get lost in long conversation threads without documented consensus.</a:t>
+            </a:r>
+          </a:p>
+          <a:p>
+            <a:pPr>
+              <a:defRPr sz="1200">
+                <a:solidFill>
+                  <a:srgbClr val="94A3B8"/>
+                </a:solidFill>
+              </a:defRPr>
+            </a:pPr>
+            <a:r>
+              <a:t>• Speaker Imbalance: Lack of visibility into speaking distribution leads to unproductive discussions dominated by single participants.</a:t>
+            </a:r>
+          </a:p>
+        </p:txBody>
+      </p:sp>
+      <p:sp>
+        <p:nvSpPr>
+          <p:cNvPr id="5" name="TextBox 4"/>
+          <p:cNvSpPr txBox="1"/>
+          <p:nvPr/>
+        </p:nvSpPr>
+        <p:spPr>
+          <a:xfrm>
+            <a:off x="6217920" y="1463040"/>
+            <a:ext cx="5120640" cy="4754880"/>
+          </a:xfrm>
+          <a:prstGeom prst="rect">
+            <a:avLst/>
+          </a:prstGeom>
+          <a:noFill/>
+        </p:spPr>
+        <p:txBody>
+          <a:bodyPr wrap="square">
+            <a:spAutoFit/>
+          </a:bodyPr>
+          <a:lstStyle/>
+          <a:p>
+            <a:pPr>
+              <a:defRPr sz="1600" b="1">
+                <a:solidFill>
+                  <a:srgbClr val="10B981"/>
+                </a:solidFill>
+              </a:defRPr>
+            </a:pPr>
+            <a:r>
+              <a:t>PROJECT-023 Automated Solution</a:t>
+            </a:r>
+          </a:p>
+          <a:p>
+            <a:pPr>
+              <a:defRPr sz="1200">
+                <a:solidFill>
+                  <a:srgbClr val="94A3B8"/>
+                </a:solidFill>
+              </a:defRPr>
+            </a:pPr>
+            <a:r>
+              <a:t>• TextRank Extractive Summarizer: Graph centrality algorithm scores salient sentences without hallucination.</a:t>
+            </a:r>
+          </a:p>
+          <a:p>
+            <a:pPr>
+              <a:defRPr sz="1200">
+                <a:solidFill>
+                  <a:srgbClr val="94A3B8"/>
+                </a:solidFill>
+              </a:defRPr>
+            </a:pPr>
+            <a:r>
+              <a:t>• Calibrated Dialogue Act Classifier: Classifies utterances into ACTION_ITEM, DECISION, DISCUSSION, and GENERAL_STATEMENT.</a:t>
+            </a:r>
+          </a:p>
+          <a:p>
+            <a:pPr>
+              <a:defRPr sz="1200">
+                <a:solidFill>
+                  <a:srgbClr val="94A3B8"/>
+                </a:solidFill>
+              </a:defRPr>
+            </a:pPr>
+            <a:r>
+              <a:t>• Automated Task Attribution: Assigns owner, priority tier (Critical, High, Medium, Low), and deadline.</a:t>
+            </a:r>
+          </a:p>
+          <a:p>
+            <a:pPr>
+              <a:defRPr sz="1200">
+                <a:solidFill>
+                  <a:srgbClr val="94A3B8"/>
+                </a:solidFill>
+              </a:defRPr>
+            </a:pPr>
+            <a:r>
+              <a:t>• ACID SQLite Minutes Ledger: Persists minutes, action item checkboxes, and generates exportable executive dossiers.</a:t>
             </a:r>
           </a:p>
         </p:txBody>
@@ -3444,13 +4986,13 @@
         <p:spPr>
           <a:xfrm>
             <a:off x="0" y="0"/>
-            <a:ext cx="12191695" cy="1097280"/>
+            <a:ext cx="12191695" cy="6858000"/>
           </a:xfrm>
           <a:prstGeom prst="rect">
             <a:avLst/>
           </a:prstGeom>
           <a:solidFill>
-            <a:srgbClr val="0F172A"/>
+            <a:srgbClr val="070E17"/>
           </a:solidFill>
           <a:ln>
             <a:noFill/>
@@ -3486,8 +5028,8 @@
         </p:nvSpPr>
         <p:spPr>
           <a:xfrm>
-            <a:off x="731520" y="137160"/>
-            <a:ext cx="10698480" cy="822960"/>
+            <a:off x="731520" y="365760"/>
+            <a:ext cx="10728655" cy="1005840"/>
           </a:xfrm>
           <a:prstGeom prst="rect">
             <a:avLst/>
@@ -3501,26 +5043,26 @@
           <a:lstStyle/>
           <a:p>
             <a:pPr>
-              <a:defRPr sz="2400" b="1">
-                <a:solidFill>
-                  <a:srgbClr val="FFFFFF"/>
-                </a:solidFill>
-              </a:defRPr>
-            </a:pPr>
-            <a:r>
-              <a:t>2. Problem Statement &amp; Key Objectives</a:t>
-            </a:r>
-          </a:p>
-          <a:p>
-            <a:pPr>
-              <a:defRPr sz="1100">
-                <a:solidFill>
-                  <a:srgbClr val="94A3B8"/>
-                </a:solidFill>
-              </a:defRPr>
-            </a:pPr>
-            <a:r>
-              <a:t>Academic &amp; Industrial AI Project Series  |  Project 23 of 55</a:t>
+              <a:defRPr sz="1100" b="1">
+                <a:solidFill>
+                  <a:srgbClr val="10B981"/>
+                </a:solidFill>
+              </a:defRPr>
+            </a:pPr>
+            <a:r>
+              <a:t>ENTERPRISE NLP &amp; MEETING INTELLIGENCE • PROJECT-023</a:t>
+            </a:r>
+          </a:p>
+          <a:p>
+            <a:pPr>
+              <a:defRPr sz="2200" b="1">
+                <a:solidFill>
+                  <a:srgbClr val="F8FAFC"/>
+                </a:solidFill>
+              </a:defRPr>
+            </a:pPr>
+            <a:r>
+              <a:t>System Architecture: End-to-End Meeting Intelligence Pipeline</a:t>
             </a:r>
           </a:p>
         </p:txBody>
@@ -3533,8 +5075,8 @@
         </p:nvSpPr>
         <p:spPr>
           <a:xfrm>
-            <a:off x="731520" y="1371600"/>
-            <a:ext cx="10698480" cy="5029200"/>
+            <a:off x="731520" y="1463040"/>
+            <a:ext cx="10728655" cy="4754880"/>
           </a:xfrm>
           <a:prstGeom prst="rect">
             <a:avLst/>
@@ -3548,123 +5090,128 @@
           <a:lstStyle/>
           <a:p>
             <a:pPr>
-              <a:spcBef>
-                <a:spcPts val="800"/>
-              </a:spcBef>
-              <a:defRPr sz="1600" b="1">
-                <a:solidFill>
-                  <a:srgbClr val="10B981"/>
-                </a:solidFill>
-              </a:defRPr>
-            </a:pPr>
-            <a:r>
-              <a:t>✓ Predictive Accuracy &amp; Generalization</a:t>
-            </a:r>
-          </a:p>
-          <a:p>
-            <a:pPr>
-              <a:spcBef>
-                <a:spcPts val="200"/>
-              </a:spcBef>
-              <a:defRPr sz="1300">
-                <a:solidFill>
-                  <a:srgbClr val="475569"/>
-                </a:solidFill>
-              </a:defRPr>
-            </a:pPr>
-            <a:r>
-              <a:t>Achieve high validation precision across diverse real-world operating distributions.</a:t>
-            </a:r>
-          </a:p>
-          <a:p>
-            <a:pPr>
-              <a:spcBef>
-                <a:spcPts val="800"/>
-              </a:spcBef>
-              <a:defRPr sz="1600" b="1">
-                <a:solidFill>
-                  <a:srgbClr val="10B981"/>
-                </a:solidFill>
-              </a:defRPr>
-            </a:pPr>
-            <a:r>
-              <a:t>✓ Real-Time Low Latency Inference</a:t>
-            </a:r>
-          </a:p>
-          <a:p>
-            <a:pPr>
-              <a:spcBef>
-                <a:spcPts val="200"/>
-              </a:spcBef>
-              <a:defRPr sz="1300">
-                <a:solidFill>
-                  <a:srgbClr val="475569"/>
-                </a:solidFill>
-              </a:defRPr>
-            </a:pPr>
-            <a:r>
-              <a:t>Deliver end-to-end processing response times under 35 milliseconds per query.</a:t>
-            </a:r>
-          </a:p>
-          <a:p>
-            <a:pPr>
-              <a:spcBef>
-                <a:spcPts val="800"/>
-              </a:spcBef>
-              <a:defRPr sz="1600" b="1">
-                <a:solidFill>
-                  <a:srgbClr val="10B981"/>
-                </a:solidFill>
-              </a:defRPr>
-            </a:pPr>
-            <a:r>
-              <a:t>✓ Robust Anomaly &amp; Boundary Handling</a:t>
-            </a:r>
-          </a:p>
-          <a:p>
-            <a:pPr>
-              <a:spcBef>
-                <a:spcPts val="200"/>
-              </a:spcBef>
-              <a:defRPr sz="1300">
-                <a:solidFill>
-                  <a:srgbClr val="475569"/>
-                </a:solidFill>
-              </a:defRPr>
-            </a:pPr>
-            <a:r>
-              <a:t>Detect out-of-distribution instances and reject anomalous inputs with deterministic alerts.</a:t>
-            </a:r>
-          </a:p>
-          <a:p>
-            <a:pPr>
-              <a:spcBef>
-                <a:spcPts val="800"/>
-              </a:spcBef>
-              <a:defRPr sz="1600" b="1">
-                <a:solidFill>
-                  <a:srgbClr val="10B981"/>
-                </a:solidFill>
-              </a:defRPr>
-            </a:pPr>
-            <a:r>
-              <a:t>✓ Production-Ready Full Stack</a:t>
-            </a:r>
-          </a:p>
-          <a:p>
-            <a:pPr>
-              <a:spcBef>
-                <a:spcPts val="200"/>
-              </a:spcBef>
-              <a:defRPr sz="1300">
-                <a:solidFill>
-                  <a:srgbClr val="475569"/>
-                </a:solidFill>
-              </a:defRPr>
-            </a:pPr>
-            <a:r>
-              <a:t>Provide modular REST APIs, audit logging, and responsive user interfaces.</a:t>
-            </a:r>
+              <a:defRPr sz="1400" b="1">
+                <a:solidFill>
+                  <a:srgbClr val="06B6D4"/>
+                </a:solidFill>
+              </a:defRPr>
+            </a:pPr>
+            <a:r>
+              <a:t>1. MULTI-SPEAKER INGESTION</a:t>
+            </a:r>
+          </a:p>
+          <a:p>
+            <a:pPr>
+              <a:defRPr sz="1200">
+                <a:solidFill>
+                  <a:srgbClr val="F8FAFC"/>
+                </a:solidFill>
+              </a:defRPr>
+            </a:pPr>
+            <a:r>
+              <a:t>Accepts multi-speaker transcripts with bracketed/colon tags e.g. [Sarah (Product Lead)]: ... Computes talk-time distribution.</a:t>
+            </a:r>
+            <a:br/>
+          </a:p>
+          <a:p>
+            <a:pPr>
+              <a:defRPr sz="1400" b="1">
+                <a:solidFill>
+                  <a:srgbClr val="06B6D4"/>
+                </a:solidFill>
+              </a:defRPr>
+            </a:pPr>
+            <a:r>
+              <a:t>2. SENTENCE SEGMENTATION &amp; TF-IDF</a:t>
+            </a:r>
+          </a:p>
+          <a:p>
+            <a:pPr>
+              <a:defRPr sz="1200">
+                <a:solidFill>
+                  <a:srgbClr val="F8FAFC"/>
+                </a:solidFill>
+              </a:defRPr>
+            </a:pPr>
+            <a:r>
+              <a:t>Tokenizes utterances, extracts n-grams across 917 vocabulary dimensions, and builds pairwise cosine similarity graph.</a:t>
+            </a:r>
+            <a:br/>
+          </a:p>
+          <a:p>
+            <a:pPr>
+              <a:defRPr sz="1400" b="1">
+                <a:solidFill>
+                  <a:srgbClr val="06B6D4"/>
+                </a:solidFill>
+              </a:defRPr>
+            </a:pPr>
+            <a:r>
+              <a:t>3. TEXTRANK CENTRALITY ENGINE</a:t>
+            </a:r>
+          </a:p>
+          <a:p>
+            <a:pPr>
+              <a:defRPr sz="1200">
+                <a:solidFill>
+                  <a:srgbClr val="F8FAFC"/>
+                </a:solidFill>
+              </a:defRPr>
+            </a:pPr>
+            <a:r>
+              <a:t>Executes power-iteration PageRank over similarity matrix to extract top salient key sentences for the executive abstract.</a:t>
+            </a:r>
+            <a:br/>
+          </a:p>
+          <a:p>
+            <a:pPr>
+              <a:defRPr sz="1400" b="1">
+                <a:solidFill>
+                  <a:srgbClr val="06B6D4"/>
+                </a:solidFill>
+              </a:defRPr>
+            </a:pPr>
+            <a:r>
+              <a:t>4. DUAL-HEAD DIALOGUE ACT CLASSIFIER</a:t>
+            </a:r>
+          </a:p>
+          <a:p>
+            <a:pPr>
+              <a:defRPr sz="1200">
+                <a:solidFill>
+                  <a:srgbClr val="F8FAFC"/>
+                </a:solidFill>
+              </a:defRPr>
+            </a:pPr>
+            <a:r>
+              <a:t>Identifies Action Items vs Strategic Decisions; predicts priority tiers (Critical to Low) and resolves assignees and deadlines.</a:t>
+            </a:r>
+            <a:br/>
+          </a:p>
+          <a:p>
+            <a:pPr>
+              <a:defRPr sz="1400" b="1">
+                <a:solidFill>
+                  <a:srgbClr val="06B6D4"/>
+                </a:solidFill>
+              </a:defRPr>
+            </a:pPr>
+            <a:r>
+              <a:t>5. PERSISTENCE &amp; EXPORT DOSSIER</a:t>
+            </a:r>
+          </a:p>
+          <a:p>
+            <a:pPr>
+              <a:defRPr sz="1200">
+                <a:solidFill>
+                  <a:srgbClr val="F8FAFC"/>
+                </a:solidFill>
+              </a:defRPr>
+            </a:pPr>
+            <a:r>
+              <a:t>Stores sessions in SQLite 3 (`meetings.db`); generates dynamic Radar Quality Profiles and exportable Markdown minutes.</a:t>
+            </a:r>
+            <a:br/>
           </a:p>
         </p:txBody>
       </p:sp>
@@ -3695,13 +5242,13 @@
         <p:spPr>
           <a:xfrm>
             <a:off x="0" y="0"/>
-            <a:ext cx="12191695" cy="1097280"/>
+            <a:ext cx="12191695" cy="6858000"/>
           </a:xfrm>
           <a:prstGeom prst="rect">
             <a:avLst/>
           </a:prstGeom>
           <a:solidFill>
-            <a:srgbClr val="0F172A"/>
+            <a:srgbClr val="070E17"/>
           </a:solidFill>
           <a:ln>
             <a:noFill/>
@@ -3737,8 +5284,8 @@
         </p:nvSpPr>
         <p:spPr>
           <a:xfrm>
-            <a:off x="731520" y="137160"/>
-            <a:ext cx="10698480" cy="822960"/>
+            <a:off x="731520" y="365760"/>
+            <a:ext cx="10728655" cy="1005840"/>
           </a:xfrm>
           <a:prstGeom prst="rect">
             <a:avLst/>
@@ -3752,26 +5299,26 @@
           <a:lstStyle/>
           <a:p>
             <a:pPr>
-              <a:defRPr sz="2400" b="1">
-                <a:solidFill>
-                  <a:srgbClr val="FFFFFF"/>
-                </a:solidFill>
-              </a:defRPr>
-            </a:pPr>
-            <a:r>
-              <a:t>3. System Architecture &amp; Workflow Pipeline</a:t>
-            </a:r>
-          </a:p>
-          <a:p>
-            <a:pPr>
-              <a:defRPr sz="1100">
-                <a:solidFill>
-                  <a:srgbClr val="94A3B8"/>
-                </a:solidFill>
-              </a:defRPr>
-            </a:pPr>
-            <a:r>
-              <a:t>Academic &amp; Industrial AI Project Series  |  Project 23 of 55</a:t>
+              <a:defRPr sz="1100" b="1">
+                <a:solidFill>
+                  <a:srgbClr val="10B981"/>
+                </a:solidFill>
+              </a:defRPr>
+            </a:pPr>
+            <a:r>
+              <a:t>ENTERPRISE NLP &amp; MEETING INTELLIGENCE • PROJECT-023</a:t>
+            </a:r>
+          </a:p>
+          <a:p>
+            <a:pPr>
+              <a:defRPr sz="2200" b="1">
+                <a:solidFill>
+                  <a:srgbClr val="F8FAFC"/>
+                </a:solidFill>
+              </a:defRPr>
+            </a:pPr>
+            <a:r>
+              <a:t>Mathematical Foundations: Graph TextRank &amp; Sentence Centrality</a:t>
             </a:r>
           </a:p>
         </p:txBody>
@@ -3784,8 +5331,8 @@
         </p:nvSpPr>
         <p:spPr>
           <a:xfrm>
-            <a:off x="731520" y="1371600"/>
-            <a:ext cx="10698480" cy="5029200"/>
+            <a:off x="731520" y="1463040"/>
+            <a:ext cx="5120640" cy="4754880"/>
           </a:xfrm>
           <a:prstGeom prst="rect">
             <a:avLst/>
@@ -3799,137 +5346,241 @@
           <a:lstStyle/>
           <a:p>
             <a:pPr>
-              <a:spcBef>
-                <a:spcPts val="800"/>
-              </a:spcBef>
               <a:defRPr sz="1500" b="1">
                 <a:solidFill>
-                  <a:srgbClr val="2563EB"/>
-                </a:solidFill>
-              </a:defRPr>
-            </a:pPr>
-            <a:r>
-              <a:t>[1] Ingestion Layer</a:t>
-            </a:r>
-          </a:p>
-          <a:p>
-            <a:pPr>
-              <a:defRPr sz="1300">
-                <a:solidFill>
-                  <a:srgbClr val="475569"/>
-                </a:solidFill>
-              </a:defRPr>
-            </a:pPr>
-            <a:r>
-              <a:t>Raw telemetry, video feeds, or structured tabular features ingested via secure endpoints.</a:t>
-            </a:r>
-          </a:p>
-          <a:p>
-            <a:pPr>
-              <a:spcBef>
-                <a:spcPts val="800"/>
-              </a:spcBef>
+                  <a:srgbClr val="10B981"/>
+                </a:solidFill>
+              </a:defRPr>
+            </a:pPr>
+            <a:r>
+              <a:t>Pairwise Cosine Similarity Graph</a:t>
+            </a:r>
+          </a:p>
+          <a:p>
+            <a:pPr>
+              <a:defRPr sz="1200">
+                <a:solidFill>
+                  <a:srgbClr val="94A3B8"/>
+                </a:solidFill>
+              </a:defRPr>
+            </a:pPr>
+            <a:r>
+              <a:t>Cosine Similarity Weight Between Sentences S_i and S_j:</a:t>
+            </a:r>
+          </a:p>
+          <a:p>
+            <a:pPr>
+              <a:defRPr sz="1200">
+                <a:solidFill>
+                  <a:srgbClr val="94A3B8"/>
+                </a:solidFill>
+              </a:defRPr>
+            </a:pPr>
+            <a:r>
+              <a:t>  w_{ij} = (v_i * v_j) / (||v_i||_2 * ||v_j||_2)</a:t>
+            </a:r>
+          </a:p>
+          <a:p>
+            <a:pPr>
+              <a:defRPr sz="1200">
+                <a:solidFill>
+                  <a:srgbClr val="94A3B8"/>
+                </a:solidFill>
+              </a:defRPr>
+            </a:pPr>
+            <a:r>
+              <a:t>Zeroing Self-Loops:</a:t>
+            </a:r>
+          </a:p>
+          <a:p>
+            <a:pPr>
+              <a:defRPr sz="1200">
+                <a:solidFill>
+                  <a:srgbClr val="94A3B8"/>
+                </a:solidFill>
+              </a:defRPr>
+            </a:pPr>
+            <a:r>
+              <a:t>  w_{ii} = 0  (Prevents self-reinforcing centrality bias)</a:t>
+            </a:r>
+          </a:p>
+          <a:p>
+            <a:pPr>
+              <a:defRPr sz="1200">
+                <a:solidFill>
+                  <a:srgbClr val="94A3B8"/>
+                </a:solidFill>
+              </a:defRPr>
+            </a:pPr>
+            <a:r>
+              <a:t>Stochastic Transition Probability Matrix:</a:t>
+            </a:r>
+          </a:p>
+          <a:p>
+            <a:pPr>
+              <a:defRPr sz="1200">
+                <a:solidFill>
+                  <a:srgbClr val="94A3B8"/>
+                </a:solidFill>
+              </a:defRPr>
+            </a:pPr>
+            <a:r>
+              <a:t>  P_{ij} = w_{ij} / sum_{k=1}^N w_{ik}</a:t>
+            </a:r>
+          </a:p>
+          <a:p>
+            <a:pPr>
+              <a:defRPr sz="1200">
+                <a:solidFill>
+                  <a:srgbClr val="94A3B8"/>
+                </a:solidFill>
+              </a:defRPr>
+            </a:pPr>
+            <a:r>
+              <a:t>Graph Properties:</a:t>
+            </a:r>
+          </a:p>
+          <a:p>
+            <a:pPr>
+              <a:defRPr sz="1200">
+                <a:solidFill>
+                  <a:srgbClr val="94A3B8"/>
+                </a:solidFill>
+              </a:defRPr>
+            </a:pPr>
+            <a:r>
+              <a:t>  Fully connected undirected weighted graph capturing semantic sentence overlap across the entire discourse.</a:t>
+            </a:r>
+          </a:p>
+        </p:txBody>
+      </p:sp>
+      <p:sp>
+        <p:nvSpPr>
+          <p:cNvPr id="5" name="TextBox 4"/>
+          <p:cNvSpPr txBox="1"/>
+          <p:nvPr/>
+        </p:nvSpPr>
+        <p:spPr>
+          <a:xfrm>
+            <a:off x="6217920" y="1463040"/>
+            <a:ext cx="5120640" cy="4754880"/>
+          </a:xfrm>
+          <a:prstGeom prst="rect">
+            <a:avLst/>
+          </a:prstGeom>
+          <a:noFill/>
+        </p:spPr>
+        <p:txBody>
+          <a:bodyPr wrap="square">
+            <a:spAutoFit/>
+          </a:bodyPr>
+          <a:lstStyle/>
+          <a:p>
+            <a:pPr>
               <a:defRPr sz="1500" b="1">
                 <a:solidFill>
-                  <a:srgbClr val="2563EB"/>
-                </a:solidFill>
-              </a:defRPr>
-            </a:pPr>
-            <a:r>
-              <a:t>[2] Preprocessing &amp; Normalization</a:t>
-            </a:r>
-          </a:p>
-          <a:p>
-            <a:pPr>
-              <a:defRPr sz="1300">
-                <a:solidFill>
-                  <a:srgbClr val="475569"/>
-                </a:solidFill>
-              </a:defRPr>
-            </a:pPr>
-            <a:r>
-              <a:t>Feature scaling, missing value imputation, winsorization, and tensor reshaping.</a:t>
-            </a:r>
-          </a:p>
-          <a:p>
-            <a:pPr>
-              <a:spcBef>
-                <a:spcPts val="800"/>
-              </a:spcBef>
-              <a:defRPr sz="1500" b="1">
-                <a:solidFill>
-                  <a:srgbClr val="2563EB"/>
-                </a:solidFill>
-              </a:defRPr>
-            </a:pPr>
-            <a:r>
-              <a:t>[3] Deep Neural Inference Engine</a:t>
-            </a:r>
-          </a:p>
-          <a:p>
-            <a:pPr>
-              <a:defRPr sz="1300">
-                <a:solidFill>
-                  <a:srgbClr val="475569"/>
-                </a:solidFill>
-              </a:defRPr>
-            </a:pPr>
-            <a:r>
-              <a:t>Optimized model evaluating representations with GPU/MPS/CPU acceleration.</a:t>
-            </a:r>
-          </a:p>
-          <a:p>
-            <a:pPr>
-              <a:spcBef>
-                <a:spcPts val="800"/>
-              </a:spcBef>
-              <a:defRPr sz="1500" b="1">
-                <a:solidFill>
-                  <a:srgbClr val="2563EB"/>
-                </a:solidFill>
-              </a:defRPr>
-            </a:pPr>
-            <a:r>
-              <a:t>[4] Post-Processing &amp; Decision Support</a:t>
-            </a:r>
-          </a:p>
-          <a:p>
-            <a:pPr>
-              <a:defRPr sz="1300">
-                <a:solidFill>
-                  <a:srgbClr val="475569"/>
-                </a:solidFill>
-              </a:defRPr>
-            </a:pPr>
-            <a:r>
-              <a:t>Threshold calibration, confidence scoring, classification/regression output formatting.</a:t>
-            </a:r>
-          </a:p>
-          <a:p>
-            <a:pPr>
-              <a:spcBef>
-                <a:spcPts val="800"/>
-              </a:spcBef>
-              <a:defRPr sz="1500" b="1">
-                <a:solidFill>
-                  <a:srgbClr val="2563EB"/>
-                </a:solidFill>
-              </a:defRPr>
-            </a:pPr>
-            <a:r>
-              <a:t>[5] Visualization &amp; Persistence</a:t>
-            </a:r>
-          </a:p>
-          <a:p>
-            <a:pPr>
-              <a:defRPr sz="1300">
-                <a:solidFill>
-                  <a:srgbClr val="475569"/>
-                </a:solidFill>
-              </a:defRPr>
-            </a:pPr>
-            <a:r>
-              <a:t>Interactive UI dashboard rendering metrics and SQLite/PostgreSQL audit logging.</a:t>
+                  <a:srgbClr val="06B6D4"/>
+                </a:solidFill>
+              </a:defRPr>
+            </a:pPr>
+            <a:r>
+              <a:t>PageRank Power Iteration Formulation</a:t>
+            </a:r>
+          </a:p>
+          <a:p>
+            <a:pPr>
+              <a:defRPr sz="1200">
+                <a:solidFill>
+                  <a:srgbClr val="94A3B8"/>
+                </a:solidFill>
+              </a:defRPr>
+            </a:pPr>
+            <a:r>
+              <a:t>PageRank Stationarity Equation:</a:t>
+            </a:r>
+          </a:p>
+          <a:p>
+            <a:pPr>
+              <a:defRPr sz="1200">
+                <a:solidFill>
+                  <a:srgbClr val="94A3B8"/>
+                </a:solidFill>
+              </a:defRPr>
+            </a:pPr>
+            <a:r>
+              <a:t>  PR(S_i) = (1 - d) / N + d * sum_{j != i} P_{ji} * PR(S_j)</a:t>
+            </a:r>
+          </a:p>
+          <a:p>
+            <a:pPr>
+              <a:defRPr sz="1200">
+                <a:solidFill>
+                  <a:srgbClr val="94A3B8"/>
+                </a:solidFill>
+              </a:defRPr>
+            </a:pPr>
+            <a:r>
+              <a:t>Damping Factor:</a:t>
+            </a:r>
+          </a:p>
+          <a:p>
+            <a:pPr>
+              <a:defRPr sz="1200">
+                <a:solidFill>
+                  <a:srgbClr val="94A3B8"/>
+                </a:solidFill>
+              </a:defRPr>
+            </a:pPr>
+            <a:r>
+              <a:t>  d = 0.85 (Standard tele-port probability for ergodicity)</a:t>
+            </a:r>
+          </a:p>
+          <a:p>
+            <a:pPr>
+              <a:defRPr sz="1200">
+                <a:solidFill>
+                  <a:srgbClr val="94A3B8"/>
+                </a:solidFill>
+              </a:defRPr>
+            </a:pPr>
+            <a:r>
+              <a:t>Power Iteration Convergence:</a:t>
+            </a:r>
+          </a:p>
+          <a:p>
+            <a:pPr>
+              <a:defRPr sz="1200">
+                <a:solidFill>
+                  <a:srgbClr val="94A3B8"/>
+                </a:solidFill>
+              </a:defRPr>
+            </a:pPr>
+            <a:r>
+              <a:t>  Converges within 25 iterations on standard CPU (&lt; 2ms).</a:t>
+            </a:r>
+          </a:p>
+          <a:p>
+            <a:pPr>
+              <a:defRPr sz="1200">
+                <a:solidFill>
+                  <a:srgbClr val="94A3B8"/>
+                </a:solidFill>
+              </a:defRPr>
+            </a:pPr>
+            <a:r>
+              <a:t>Salience Ranking:</a:t>
+            </a:r>
+          </a:p>
+          <a:p>
+            <a:pPr>
+              <a:defRPr sz="1200">
+                <a:solidFill>
+                  <a:srgbClr val="94A3B8"/>
+                </a:solidFill>
+              </a:defRPr>
+            </a:pPr>
+            <a:r>
+              <a:t>  Top-k highest stationary eigenvector components form the extractive core of the meeting summary.</a:t>
             </a:r>
           </a:p>
         </p:txBody>
@@ -3961,13 +5612,13 @@
         <p:spPr>
           <a:xfrm>
             <a:off x="0" y="0"/>
-            <a:ext cx="12191695" cy="1097280"/>
+            <a:ext cx="12191695" cy="6858000"/>
           </a:xfrm>
           <a:prstGeom prst="rect">
             <a:avLst/>
           </a:prstGeom>
           <a:solidFill>
-            <a:srgbClr val="0F172A"/>
+            <a:srgbClr val="070E17"/>
           </a:solidFill>
           <a:ln>
             <a:noFill/>
@@ -4003,8 +5654,8 @@
         </p:nvSpPr>
         <p:spPr>
           <a:xfrm>
-            <a:off x="731520" y="137160"/>
-            <a:ext cx="10698480" cy="822960"/>
+            <a:off x="731520" y="365760"/>
+            <a:ext cx="10728655" cy="1005840"/>
           </a:xfrm>
           <a:prstGeom prst="rect">
             <a:avLst/>
@@ -4018,26 +5669,26 @@
           <a:lstStyle/>
           <a:p>
             <a:pPr>
-              <a:defRPr sz="2400" b="1">
-                <a:solidFill>
-                  <a:srgbClr val="FFFFFF"/>
-                </a:solidFill>
-              </a:defRPr>
-            </a:pPr>
-            <a:r>
-              <a:t>4. Deep Learning &amp; ML Methodology</a:t>
-            </a:r>
-          </a:p>
-          <a:p>
-            <a:pPr>
-              <a:defRPr sz="1100">
-                <a:solidFill>
-                  <a:srgbClr val="94A3B8"/>
-                </a:solidFill>
-              </a:defRPr>
-            </a:pPr>
-            <a:r>
-              <a:t>Academic &amp; Industrial AI Project Series  |  Project 23 of 55</a:t>
+              <a:defRPr sz="1100" b="1">
+                <a:solidFill>
+                  <a:srgbClr val="10B981"/>
+                </a:solidFill>
+              </a:defRPr>
+            </a:pPr>
+            <a:r>
+              <a:t>ENTERPRISE NLP &amp; MEETING INTELLIGENCE • PROJECT-023</a:t>
+            </a:r>
+          </a:p>
+          <a:p>
+            <a:pPr>
+              <a:defRPr sz="2200" b="1">
+                <a:solidFill>
+                  <a:srgbClr val="F8FAFC"/>
+                </a:solidFill>
+              </a:defRPr>
+            </a:pPr>
+            <a:r>
+              <a:t>Dialogue Act Taxonomy &amp; Action Item Priority Classification</a:t>
             </a:r>
           </a:p>
         </p:txBody>
@@ -4050,8 +5701,8 @@
         </p:nvSpPr>
         <p:spPr>
           <a:xfrm>
-            <a:off x="731520" y="1371600"/>
-            <a:ext cx="10698480" cy="5029200"/>
+            <a:off x="731520" y="1463040"/>
+            <a:ext cx="10728655" cy="4754880"/>
           </a:xfrm>
           <a:prstGeom prst="rect">
             <a:avLst/>
@@ -4065,110 +5716,98 @@
           <a:lstStyle/>
           <a:p>
             <a:pPr>
-              <a:spcBef>
-                <a:spcPts val="800"/>
-              </a:spcBef>
-              <a:defRPr sz="1500" b="1">
-                <a:solidFill>
-                  <a:srgbClr val="0F172A"/>
-                </a:solidFill>
-              </a:defRPr>
-            </a:pPr>
-            <a:r>
-              <a:t>• Feature Engineering &amp; Dimensionality Alignment</a:t>
-            </a:r>
-          </a:p>
-          <a:p>
-            <a:pPr>
-              <a:defRPr sz="1300">
-                <a:solidFill>
-                  <a:srgbClr val="475569"/>
-                </a:solidFill>
-              </a:defRPr>
-            </a:pPr>
-            <a:r>
-              <a:t>Domain-specific feature extraction, temporal windowing, and embedding vectors.</a:t>
-            </a:r>
-          </a:p>
-          <a:p>
-            <a:pPr>
-              <a:spcBef>
-                <a:spcPts val="800"/>
-              </a:spcBef>
-              <a:defRPr sz="1500" b="1">
-                <a:solidFill>
-                  <a:srgbClr val="0F172A"/>
-                </a:solidFill>
-              </a:defRPr>
-            </a:pPr>
-            <a:r>
-              <a:t>• Model Family &amp; Optimization</a:t>
-            </a:r>
-          </a:p>
-          <a:p>
-            <a:pPr>
-              <a:defRPr sz="1300">
-                <a:solidFill>
-                  <a:srgbClr val="475569"/>
-                </a:solidFill>
-              </a:defRPr>
-            </a:pPr>
-            <a:r>
-              <a:t>Ensemble gradient boosting or deep neural networks trained with AdamW and adaptive LR scheduling.</a:t>
-            </a:r>
-          </a:p>
-          <a:p>
-            <a:pPr>
-              <a:spcBef>
-                <a:spcPts val="800"/>
-              </a:spcBef>
-              <a:defRPr sz="1500" b="1">
-                <a:solidFill>
-                  <a:srgbClr val="0F172A"/>
-                </a:solidFill>
-              </a:defRPr>
-            </a:pPr>
-            <a:r>
-              <a:t>• Overfitting Mitigation</a:t>
-            </a:r>
-          </a:p>
-          <a:p>
-            <a:pPr>
-              <a:defRPr sz="1300">
-                <a:solidFill>
-                  <a:srgbClr val="475569"/>
-                </a:solidFill>
-              </a:defRPr>
-            </a:pPr>
-            <a:r>
-              <a:t>Stratified k-fold cross-validation, dropout layers, early stopping, and data augmentation.</a:t>
-            </a:r>
-          </a:p>
-          <a:p>
-            <a:pPr>
-              <a:spcBef>
-                <a:spcPts val="800"/>
-              </a:spcBef>
-              <a:defRPr sz="1500" b="1">
-                <a:solidFill>
-                  <a:srgbClr val="0F172A"/>
-                </a:solidFill>
-              </a:defRPr>
-            </a:pPr>
-            <a:r>
-              <a:t>• Explainability &amp; Auditability</a:t>
-            </a:r>
-          </a:p>
-          <a:p>
-            <a:pPr>
-              <a:defRPr sz="1300">
-                <a:solidFill>
-                  <a:srgbClr val="475569"/>
-                </a:solidFill>
-              </a:defRPr>
-            </a:pPr>
-            <a:r>
-              <a:t>Confidence scores and feature importance attributions for high-stakes decisions.</a:t>
+              <a:defRPr sz="1300" b="1">
+                <a:solidFill>
+                  <a:srgbClr val="F8FAFC"/>
+                </a:solidFill>
+              </a:defRPr>
+            </a:pPr>
+            <a:r>
+              <a:t>📋 ACTION_ITEM (2,171 samples)</a:t>
+            </a:r>
+          </a:p>
+          <a:p>
+            <a:pPr>
+              <a:defRPr sz="1100">
+                <a:solidFill>
+                  <a:srgbClr val="94A3B8"/>
+                </a:solidFill>
+              </a:defRPr>
+            </a:pPr>
+            <a:r>
+              <a:t>Identifies explicit commitments e.g., 'I will deploy the canary release v2.4 to staging by Friday.' -&gt; Evaluates Priority (Critical, High, Medium, Low) &amp; extracts Assignee and Deadline.</a:t>
+            </a:r>
+          </a:p>
+          <a:p>
+            <a:pPr>
+              <a:defRPr sz="1300" b="1">
+                <a:solidFill>
+                  <a:srgbClr val="F8FAFC"/>
+                </a:solidFill>
+              </a:defRPr>
+            </a:pPr>
+            <a:r>
+              <a:t>🤝 DECISION (1,465 samples)</a:t>
+            </a:r>
+          </a:p>
+          <a:p>
+            <a:pPr>
+              <a:defRPr sz="1100">
+                <a:solidFill>
+                  <a:srgbClr val="94A3B8"/>
+                </a:solidFill>
+              </a:defRPr>
+            </a:pPr>
+            <a:r>
+              <a:t>Captures organizational agreements e.g., 'We decided to approve Kafka as our standard messaging backbone.' -&gt; Logs into agreed decision register.</a:t>
+            </a:r>
+          </a:p>
+          <a:p>
+            <a:pPr>
+              <a:defRPr sz="1300" b="1">
+                <a:solidFill>
+                  <a:srgbClr val="F8FAFC"/>
+                </a:solidFill>
+              </a:defRPr>
+            </a:pPr>
+            <a:r>
+              <a:t>💬 DISCUSSION (1,464 samples)</a:t>
+            </a:r>
+          </a:p>
+          <a:p>
+            <a:pPr>
+              <a:defRPr sz="1100">
+                <a:solidFill>
+                  <a:srgbClr val="94A3B8"/>
+                </a:solidFill>
+              </a:defRPr>
+            </a:pPr>
+            <a:r>
+              <a:t>Technical trade-off debates and metrics review e.g., 'Let's review the Q3 cloud architecture and discuss our cross-region latency benchmarks.' -&gt; Feeds TextRank centrality.</a:t>
+            </a:r>
+          </a:p>
+          <a:p>
+            <a:pPr>
+              <a:defRPr sz="1300" b="1">
+                <a:solidFill>
+                  <a:srgbClr val="F8FAFC"/>
+                </a:solidFill>
+              </a:defRPr>
+            </a:pPr>
+            <a:r>
+              <a:t>🗣️ GENERAL_STATEMENT (900 samples)</a:t>
+            </a:r>
+          </a:p>
+          <a:p>
+            <a:pPr>
+              <a:defRPr sz="1100">
+                <a:solidFill>
+                  <a:srgbClr val="94A3B8"/>
+                </a:solidFill>
+              </a:defRPr>
+            </a:pPr>
+            <a:r>
+              <a:t>Chitchat, greetings, logistical announcements e.g., 'Good morning everyone, thank you for joining.' -&gt; Filtered from action and decision logs.</a:t>
             </a:r>
           </a:p>
         </p:txBody>
@@ -4200,13 +5839,13 @@
         <p:spPr>
           <a:xfrm>
             <a:off x="0" y="0"/>
-            <a:ext cx="12191695" cy="1097280"/>
+            <a:ext cx="12191695" cy="6858000"/>
           </a:xfrm>
           <a:prstGeom prst="rect">
             <a:avLst/>
           </a:prstGeom>
           <a:solidFill>
-            <a:srgbClr val="0F172A"/>
+            <a:srgbClr val="070E17"/>
           </a:solidFill>
           <a:ln>
             <a:noFill/>
@@ -4242,8 +5881,8 @@
         </p:nvSpPr>
         <p:spPr>
           <a:xfrm>
-            <a:off x="731520" y="137160"/>
-            <a:ext cx="10698480" cy="822960"/>
+            <a:off x="731520" y="365760"/>
+            <a:ext cx="10728655" cy="1005840"/>
           </a:xfrm>
           <a:prstGeom prst="rect">
             <a:avLst/>
@@ -4257,40 +5896,64 @@
           <a:lstStyle/>
           <a:p>
             <a:pPr>
-              <a:defRPr sz="2400" b="1">
-                <a:solidFill>
-                  <a:srgbClr val="FFFFFF"/>
-                </a:solidFill>
-              </a:defRPr>
-            </a:pPr>
-            <a:r>
-              <a:t>5. Experimental Results &amp; Performance Benchmarks</a:t>
-            </a:r>
-          </a:p>
-          <a:p>
-            <a:pPr>
-              <a:defRPr sz="1100">
-                <a:solidFill>
-                  <a:srgbClr val="94A3B8"/>
-                </a:solidFill>
-              </a:defRPr>
-            </a:pPr>
-            <a:r>
-              <a:t>Academic &amp; Industrial AI Project Series  |  Project 23 of 55</a:t>
-            </a:r>
-          </a:p>
-        </p:txBody>
-      </p:sp>
-      <p:sp>
-        <p:nvSpPr>
-          <p:cNvPr id="4" name="TextBox 3"/>
+              <a:defRPr sz="1100" b="1">
+                <a:solidFill>
+                  <a:srgbClr val="10B981"/>
+                </a:solidFill>
+              </a:defRPr>
+            </a:pPr>
+            <a:r>
+              <a:t>ENTERPRISE NLP &amp; MEETING INTELLIGENCE • PROJECT-023</a:t>
+            </a:r>
+          </a:p>
+          <a:p>
+            <a:pPr>
+              <a:defRPr sz="2200" b="1">
+                <a:solidFill>
+                  <a:srgbClr val="F8FAFC"/>
+                </a:solidFill>
+              </a:defRPr>
+            </a:pPr>
+            <a:r>
+              <a:t>Live Intelligent Meeting Cockpit UI (Port 5023)</a:t>
+            </a:r>
+          </a:p>
+        </p:txBody>
+      </p:sp>
+      <p:pic>
+        <p:nvPicPr>
+          <p:cNvPr id="4" name="Picture 3" descr="01_dashboard_overview.png"/>
+          <p:cNvPicPr>
+            <a:picLocks noChangeAspect="1"/>
+          </p:cNvPicPr>
+          <p:nvPr/>
+        </p:nvPicPr>
+        <p:blipFill>
+          <a:blip r:embed="rId2"/>
+          <a:stretch>
+            <a:fillRect/>
+          </a:stretch>
+        </p:blipFill>
+        <p:spPr>
+          <a:xfrm>
+            <a:off x="731520" y="1463040"/>
+            <a:ext cx="6949440" cy="4754880"/>
+          </a:xfrm>
+          <a:prstGeom prst="rect">
+            <a:avLst/>
+          </a:prstGeom>
+        </p:spPr>
+      </p:pic>
+      <p:sp>
+        <p:nvSpPr>
+          <p:cNvPr id="5" name="TextBox 4"/>
           <p:cNvSpPr txBox="1"/>
           <p:nvPr/>
         </p:nvSpPr>
         <p:spPr>
           <a:xfrm>
-            <a:off x="731520" y="1371600"/>
-            <a:ext cx="10698480" cy="5029200"/>
+            <a:off x="7955279" y="1463040"/>
+            <a:ext cx="3474720" cy="4754880"/>
           </a:xfrm>
           <a:prstGeom prst="rect">
             <a:avLst/>
@@ -4304,62 +5967,62 @@
           <a:lstStyle/>
           <a:p>
             <a:pPr>
-              <a:spcBef>
-                <a:spcPts val="1200"/>
-              </a:spcBef>
-              <a:defRPr sz="1500" b="1">
+              <a:defRPr sz="1600" b="1">
                 <a:solidFill>
                   <a:srgbClr val="10B981"/>
                 </a:solidFill>
               </a:defRPr>
             </a:pPr>
             <a:r>
-              <a:t>★ Validation Accuracy / Score: Achieved 94.8% on independent validation test holdout partitions.</a:t>
-            </a:r>
-          </a:p>
-          <a:p>
-            <a:pPr>
-              <a:spcBef>
-                <a:spcPts val="1200"/>
-              </a:spcBef>
-              <a:defRPr sz="1500" b="1">
-                <a:solidFill>
-                  <a:srgbClr val="10B981"/>
-                </a:solidFill>
-              </a:defRPr>
-            </a:pPr>
-            <a:r>
-              <a:t>★ F1-Score / Macro Precision: Balanced metric of 0.932 across positive and negative classification targets.</a:t>
-            </a:r>
-          </a:p>
-          <a:p>
-            <a:pPr>
-              <a:spcBef>
-                <a:spcPts val="1200"/>
-              </a:spcBef>
-              <a:defRPr sz="1500" b="1">
-                <a:solidFill>
-                  <a:srgbClr val="10B981"/>
-                </a:solidFill>
-              </a:defRPr>
-            </a:pPr>
-            <a:r>
-              <a:t>★ Inference Latency Profile: Median latency of 18.4 ms per inference query on edge CPU hardware.</a:t>
-            </a:r>
-          </a:p>
-          <a:p>
-            <a:pPr>
-              <a:spcBef>
-                <a:spcPts val="1200"/>
-              </a:spcBef>
-              <a:defRPr sz="1500" b="1">
-                <a:solidFill>
-                  <a:srgbClr val="10B981"/>
-                </a:solidFill>
-              </a:defRPr>
-            </a:pPr>
-            <a:r>
-              <a:t>★ False Positive Rate (FPR): Maintained below 2.8%, satisfying stringent operational false alarm constraints.</a:t>
+              <a:t>Cockpit Key Highlights</a:t>
+            </a:r>
+          </a:p>
+          <a:p>
+            <a:pPr>
+              <a:defRPr sz="1100">
+                <a:solidFill>
+                  <a:srgbClr val="94A3B8"/>
+                </a:solidFill>
+              </a:defRPr>
+            </a:pPr>
+            <a:r>
+              <a:t>• Enterprise dark telemetry dashboard with HTML5 Canvas audio wave animation.</a:t>
+            </a:r>
+          </a:p>
+          <a:p>
+            <a:pPr>
+              <a:defRPr sz="1100">
+                <a:solidFill>
+                  <a:srgbClr val="94A3B8"/>
+                </a:solidFill>
+              </a:defRPr>
+            </a:pPr>
+            <a:r>
+              <a:t>• KPI metric cards: Total Meetings Indexed, Total Action Items, Decisions Logged, and Average Engagement %.</a:t>
+            </a:r>
+          </a:p>
+          <a:p>
+            <a:pPr>
+              <a:defRPr sz="1100">
+                <a:solidFill>
+                  <a:srgbClr val="94A3B8"/>
+                </a:solidFill>
+              </a:defRPr>
+            </a:pPr>
+            <a:r>
+              <a:t>• Split-screen layout: Multi-speaker transcript ingestion on left; AI generated summary, tasks, decisions, and analytics on right.</a:t>
+            </a:r>
+          </a:p>
+          <a:p>
+            <a:pPr>
+              <a:defRPr sz="1100">
+                <a:solidFill>
+                  <a:srgbClr val="94A3B8"/>
+                </a:solidFill>
+              </a:defRPr>
+            </a:pPr>
+            <a:r>
+              <a:t>• Real-time historical session archive streaming from SQLite.</a:t>
             </a:r>
           </a:p>
         </p:txBody>
@@ -4391,13 +6054,13 @@
         <p:spPr>
           <a:xfrm>
             <a:off x="0" y="0"/>
-            <a:ext cx="12191695" cy="1097280"/>
+            <a:ext cx="12191695" cy="6858000"/>
           </a:xfrm>
           <a:prstGeom prst="rect">
             <a:avLst/>
           </a:prstGeom>
           <a:solidFill>
-            <a:srgbClr val="0F172A"/>
+            <a:srgbClr val="070E17"/>
           </a:solidFill>
           <a:ln>
             <a:noFill/>
@@ -4433,8 +6096,8 @@
         </p:nvSpPr>
         <p:spPr>
           <a:xfrm>
-            <a:off x="731520" y="137160"/>
-            <a:ext cx="10698480" cy="822960"/>
+            <a:off x="731520" y="365760"/>
+            <a:ext cx="10728655" cy="1005840"/>
           </a:xfrm>
           <a:prstGeom prst="rect">
             <a:avLst/>
@@ -4448,40 +6111,64 @@
           <a:lstStyle/>
           <a:p>
             <a:pPr>
-              <a:defRPr sz="2400" b="1">
-                <a:solidFill>
-                  <a:srgbClr val="FFFFFF"/>
-                </a:solidFill>
-              </a:defRPr>
-            </a:pPr>
-            <a:r>
-              <a:t>6. Technology Stack &amp; Production Deployment</a:t>
-            </a:r>
-          </a:p>
-          <a:p>
-            <a:pPr>
-              <a:defRPr sz="1100">
-                <a:solidFill>
-                  <a:srgbClr val="94A3B8"/>
-                </a:solidFill>
-              </a:defRPr>
-            </a:pPr>
-            <a:r>
-              <a:t>Academic &amp; Industrial AI Project Series  |  Project 23 of 55</a:t>
-            </a:r>
-          </a:p>
-        </p:txBody>
-      </p:sp>
-      <p:sp>
-        <p:nvSpPr>
-          <p:cNvPr id="4" name="TextBox 3"/>
+              <a:defRPr sz="1100" b="1">
+                <a:solidFill>
+                  <a:srgbClr val="10B981"/>
+                </a:solidFill>
+              </a:defRPr>
+            </a:pPr>
+            <a:r>
+              <a:t>ENTERPRISE NLP &amp; MEETING INTELLIGENCE • PROJECT-023</a:t>
+            </a:r>
+          </a:p>
+          <a:p>
+            <a:pPr>
+              <a:defRPr sz="2200" b="1">
+                <a:solidFill>
+                  <a:srgbClr val="F8FAFC"/>
+                </a:solidFill>
+              </a:defRPr>
+            </a:pPr>
+            <a:r>
+              <a:t>Multi-Speaker Transcript Ingestion &amp; Preset Scenarios</a:t>
+            </a:r>
+          </a:p>
+        </p:txBody>
+      </p:sp>
+      <p:pic>
+        <p:nvPicPr>
+          <p:cNvPr id="4" name="Picture 3" descr="02_transcript_input_interface.png"/>
+          <p:cNvPicPr>
+            <a:picLocks noChangeAspect="1"/>
+          </p:cNvPicPr>
+          <p:nvPr/>
+        </p:nvPicPr>
+        <p:blipFill>
+          <a:blip r:embed="rId2"/>
+          <a:stretch>
+            <a:fillRect/>
+          </a:stretch>
+        </p:blipFill>
+        <p:spPr>
+          <a:xfrm>
+            <a:off x="731520" y="1645920"/>
+            <a:ext cx="6766560" cy="4389120"/>
+          </a:xfrm>
+          <a:prstGeom prst="rect">
+            <a:avLst/>
+          </a:prstGeom>
+        </p:spPr>
+      </p:pic>
+      <p:sp>
+        <p:nvSpPr>
+          <p:cNvPr id="5" name="TextBox 4"/>
           <p:cNvSpPr txBox="1"/>
           <p:nvPr/>
         </p:nvSpPr>
         <p:spPr>
           <a:xfrm>
-            <a:off x="731520" y="1371600"/>
-            <a:ext cx="10698480" cy="5029200"/>
+            <a:off x="7772400" y="1645920"/>
+            <a:ext cx="3657600" cy="4389120"/>
           </a:xfrm>
           <a:prstGeom prst="rect">
             <a:avLst/>
@@ -4495,110 +6182,62 @@
           <a:lstStyle/>
           <a:p>
             <a:pPr>
-              <a:spcBef>
-                <a:spcPts val="800"/>
-              </a:spcBef>
-              <a:defRPr sz="1500" b="1">
-                <a:solidFill>
-                  <a:srgbClr val="1E3A8A"/>
-                </a:solidFill>
-              </a:defRPr>
-            </a:pPr>
-            <a:r>
-              <a:t>⚙ Core Machine Learning Framework</a:t>
-            </a:r>
-          </a:p>
-          <a:p>
-            <a:pPr>
-              <a:defRPr sz="1300">
-                <a:solidFill>
-                  <a:srgbClr val="475569"/>
-                </a:solidFill>
-              </a:defRPr>
-            </a:pPr>
-            <a:r>
-              <a:t>PyTorch 2.0+ / Scikit-learn / HuggingFace Transformers / OpenCV</a:t>
-            </a:r>
-          </a:p>
-          <a:p>
-            <a:pPr>
-              <a:spcBef>
-                <a:spcPts val="800"/>
-              </a:spcBef>
-              <a:defRPr sz="1500" b="1">
-                <a:solidFill>
-                  <a:srgbClr val="1E3A8A"/>
-                </a:solidFill>
-              </a:defRPr>
-            </a:pPr>
-            <a:r>
-              <a:t>⚙ Asynchronous REST Backend</a:t>
-            </a:r>
-          </a:p>
-          <a:p>
-            <a:pPr>
-              <a:defRPr sz="1300">
-                <a:solidFill>
-                  <a:srgbClr val="475569"/>
-                </a:solidFill>
-              </a:defRPr>
-            </a:pPr>
-            <a:r>
-              <a:t>FastAPI / Uvicorn ASGI Server / Pydantic V2 Type Safety</a:t>
-            </a:r>
-          </a:p>
-          <a:p>
-            <a:pPr>
-              <a:spcBef>
-                <a:spcPts val="800"/>
-              </a:spcBef>
-              <a:defRPr sz="1500" b="1">
-                <a:solidFill>
-                  <a:srgbClr val="1E3A8A"/>
-                </a:solidFill>
-              </a:defRPr>
-            </a:pPr>
-            <a:r>
-              <a:t>⚙ Data Persistence &amp; Storage</a:t>
-            </a:r>
-          </a:p>
-          <a:p>
-            <a:pPr>
-              <a:defRPr sz="1300">
-                <a:solidFill>
-                  <a:srgbClr val="475569"/>
-                </a:solidFill>
-              </a:defRPr>
-            </a:pPr>
-            <a:r>
-              <a:t>SQLite / PostgreSQL with transactional integrity &amp; audit trail</a:t>
-            </a:r>
-          </a:p>
-          <a:p>
-            <a:pPr>
-              <a:spcBef>
-                <a:spcPts val="800"/>
-              </a:spcBef>
-              <a:defRPr sz="1500" b="1">
-                <a:solidFill>
-                  <a:srgbClr val="1E3A8A"/>
-                </a:solidFill>
-              </a:defRPr>
-            </a:pPr>
-            <a:r>
-              <a:t>⚙ Interactive Frontend Layer</a:t>
-            </a:r>
-          </a:p>
-          <a:p>
-            <a:pPr>
-              <a:defRPr sz="1300">
-                <a:solidFill>
-                  <a:srgbClr val="475569"/>
-                </a:solidFill>
-              </a:defRPr>
-            </a:pPr>
-            <a:r>
-              <a:t>Modern Responsive Web Portal (HTML5, Tailwind/CSS, JavaScript ES6+)</a:t>
+              <a:defRPr sz="1600" b="1">
+                <a:solidFill>
+                  <a:srgbClr val="06B6D4"/>
+                </a:solidFill>
+              </a:defRPr>
+            </a:pPr>
+            <a:r>
+              <a:t>Ingestion Features</a:t>
+            </a:r>
+          </a:p>
+          <a:p>
+            <a:pPr>
+              <a:defRPr sz="1100">
+                <a:solidFill>
+                  <a:srgbClr val="94A3B8"/>
+                </a:solidFill>
+              </a:defRPr>
+            </a:pPr>
+            <a:r>
+              <a:t>• Preloaded Real Scenarios: Architecture Review, Sprint Planning &amp; Blocker Triage, Product Launch Retrospective.</a:t>
+            </a:r>
+          </a:p>
+          <a:p>
+            <a:pPr>
+              <a:defRPr sz="1100">
+                <a:solidFill>
+                  <a:srgbClr val="94A3B8"/>
+                </a:solidFill>
+              </a:defRPr>
+            </a:pPr>
+            <a:r>
+              <a:t>• Speaker Turn Recognition: Parses speaker tags e.g., `[Sarah (Product Lead)]:` or `Marcus:` automatically.</a:t>
+            </a:r>
+          </a:p>
+          <a:p>
+            <a:pPr>
+              <a:defRPr sz="1100">
+                <a:solidFill>
+                  <a:srgbClr val="94A3B8"/>
+                </a:solidFill>
+              </a:defRPr>
+            </a:pPr>
+            <a:r>
+              <a:t>• Word Count &amp; Duration Estimation: Derives speech duration based on 130 words-per-minute conversational baseline.</a:t>
+            </a:r>
+          </a:p>
+          <a:p>
+            <a:pPr>
+              <a:defRPr sz="1100">
+                <a:solidFill>
+                  <a:srgbClr val="94A3B8"/>
+                </a:solidFill>
+              </a:defRPr>
+            </a:pPr>
+            <a:r>
+              <a:t>• Sublinear Tokenizer: Seamlessly vectorized across 917 unigram and bigram vocabulary features.</a:t>
             </a:r>
           </a:p>
         </p:txBody>
@@ -4630,13 +6269,13 @@
         <p:spPr>
           <a:xfrm>
             <a:off x="0" y="0"/>
-            <a:ext cx="12191695" cy="1097280"/>
+            <a:ext cx="12191695" cy="6858000"/>
           </a:xfrm>
           <a:prstGeom prst="rect">
             <a:avLst/>
           </a:prstGeom>
           <a:solidFill>
-            <a:srgbClr val="0F172A"/>
+            <a:srgbClr val="070E17"/>
           </a:solidFill>
           <a:ln>
             <a:noFill/>
@@ -4672,8 +6311,8 @@
         </p:nvSpPr>
         <p:spPr>
           <a:xfrm>
-            <a:off x="731520" y="137160"/>
-            <a:ext cx="10698480" cy="822960"/>
+            <a:off x="731520" y="365760"/>
+            <a:ext cx="10728655" cy="1005840"/>
           </a:xfrm>
           <a:prstGeom prst="rect">
             <a:avLst/>
@@ -4687,40 +6326,64 @@
           <a:lstStyle/>
           <a:p>
             <a:pPr>
-              <a:defRPr sz="2400" b="1">
-                <a:solidFill>
-                  <a:srgbClr val="FFFFFF"/>
-                </a:solidFill>
-              </a:defRPr>
-            </a:pPr>
-            <a:r>
-              <a:t>7. Conclusion &amp; Future Roadmap</a:t>
-            </a:r>
-          </a:p>
-          <a:p>
-            <a:pPr>
-              <a:defRPr sz="1100">
-                <a:solidFill>
-                  <a:srgbClr val="94A3B8"/>
-                </a:solidFill>
-              </a:defRPr>
-            </a:pPr>
-            <a:r>
-              <a:t>Academic &amp; Industrial AI Project Series  |  Project 23 of 55</a:t>
-            </a:r>
-          </a:p>
-        </p:txBody>
-      </p:sp>
-      <p:sp>
-        <p:nvSpPr>
-          <p:cNvPr id="4" name="TextBox 3"/>
+              <a:defRPr sz="1100" b="1">
+                <a:solidFill>
+                  <a:srgbClr val="10B981"/>
+                </a:solidFill>
+              </a:defRPr>
+            </a:pPr>
+            <a:r>
+              <a:t>ENTERPRISE NLP &amp; MEETING INTELLIGENCE • PROJECT-023</a:t>
+            </a:r>
+          </a:p>
+          <a:p>
+            <a:pPr>
+              <a:defRPr sz="2200" b="1">
+                <a:solidFill>
+                  <a:srgbClr val="F8FAFC"/>
+                </a:solidFill>
+              </a:defRPr>
+            </a:pPr>
+            <a:r>
+              <a:t>Executive Abstractive &amp; Extractive Meeting Summary</a:t>
+            </a:r>
+          </a:p>
+        </p:txBody>
+      </p:sp>
+      <p:pic>
+        <p:nvPicPr>
+          <p:cNvPr id="4" name="Picture 3" descr="03_executive_summary_panel.png"/>
+          <p:cNvPicPr>
+            <a:picLocks noChangeAspect="1"/>
+          </p:cNvPicPr>
+          <p:nvPr/>
+        </p:nvPicPr>
+        <p:blipFill>
+          <a:blip r:embed="rId2"/>
+          <a:stretch>
+            <a:fillRect/>
+          </a:stretch>
+        </p:blipFill>
+        <p:spPr>
+          <a:xfrm>
+            <a:off x="731520" y="1645920"/>
+            <a:ext cx="6766560" cy="4389120"/>
+          </a:xfrm>
+          <a:prstGeom prst="rect">
+            <a:avLst/>
+          </a:prstGeom>
+        </p:spPr>
+      </p:pic>
+      <p:sp>
+        <p:nvSpPr>
+          <p:cNvPr id="5" name="TextBox 4"/>
           <p:cNvSpPr txBox="1"/>
           <p:nvPr/>
         </p:nvSpPr>
         <p:spPr>
           <a:xfrm>
-            <a:off x="731520" y="1371600"/>
-            <a:ext cx="10698480" cy="5029200"/>
+            <a:off x="7772400" y="1645920"/>
+            <a:ext cx="3657600" cy="4389120"/>
           </a:xfrm>
           <a:prstGeom prst="rect">
             <a:avLst/>
@@ -4734,83 +6397,289 @@
           <a:lstStyle/>
           <a:p>
             <a:pPr>
-              <a:spcBef>
-                <a:spcPts val="1000"/>
-              </a:spcBef>
-              <a:defRPr sz="1500" b="1">
-                <a:solidFill>
-                  <a:srgbClr val="0F172A"/>
-                </a:solidFill>
-              </a:defRPr>
-            </a:pPr>
-            <a:r>
-              <a:t>■ Project Accomplishments</a:t>
-            </a:r>
-          </a:p>
-          <a:p>
-            <a:pPr>
-              <a:defRPr sz="1300">
-                <a:solidFill>
-                  <a:srgbClr val="475569"/>
-                </a:solidFill>
-              </a:defRPr>
-            </a:pPr>
-            <a:r>
-              <a:t>Engineered a robust, end-to-end prototype validating the initial abstract with reproducible experiments.</a:t>
-            </a:r>
-          </a:p>
-          <a:p>
-            <a:pPr>
-              <a:spcBef>
-                <a:spcPts val="1000"/>
-              </a:spcBef>
-              <a:defRPr sz="1500" b="1">
-                <a:solidFill>
-                  <a:srgbClr val="0F172A"/>
-                </a:solidFill>
-              </a:defRPr>
-            </a:pPr>
-            <a:r>
-              <a:t>■ Industrial Significance</a:t>
-            </a:r>
-          </a:p>
-          <a:p>
-            <a:pPr>
-              <a:defRPr sz="1300">
-                <a:solidFill>
-                  <a:srgbClr val="475569"/>
-                </a:solidFill>
-              </a:defRPr>
-            </a:pPr>
-            <a:r>
-              <a:t>Eliminates latency and manual friction while ensuring high confidence automated decision support.</a:t>
-            </a:r>
-          </a:p>
-          <a:p>
-            <a:pPr>
-              <a:spcBef>
-                <a:spcPts val="1000"/>
-              </a:spcBef>
-              <a:defRPr sz="1500" b="1">
-                <a:solidFill>
-                  <a:srgbClr val="0F172A"/>
-                </a:solidFill>
-              </a:defRPr>
-            </a:pPr>
-            <a:r>
-              <a:t>■ Future Scope &amp; Extensions</a:t>
-            </a:r>
-          </a:p>
-          <a:p>
-            <a:pPr>
-              <a:defRPr sz="1300">
-                <a:solidFill>
-                  <a:srgbClr val="475569"/>
-                </a:solidFill>
-              </a:defRPr>
-            </a:pPr>
-            <a:r>
-              <a:t>Integration with federated edge sensors, distributed multi-tenant cloud clustering, and automated active learning.</a:t>
+              <a:defRPr sz="1600" b="1">
+                <a:solidFill>
+                  <a:srgbClr val="10B981"/>
+                </a:solidFill>
+              </a:defRPr>
+            </a:pPr>
+            <a:r>
+              <a:t>Summarization Highlights</a:t>
+            </a:r>
+          </a:p>
+          <a:p>
+            <a:pPr>
+              <a:defRPr sz="1100">
+                <a:solidFill>
+                  <a:srgbClr val="94A3B8"/>
+                </a:solidFill>
+              </a:defRPr>
+            </a:pPr>
+            <a:r>
+              <a:t>• Executive Paragraph: Concise high-level context synthesizing purpose and outcomes of the session.</a:t>
+            </a:r>
+          </a:p>
+          <a:p>
+            <a:pPr>
+              <a:defRPr sz="1100">
+                <a:solidFill>
+                  <a:srgbClr val="94A3B8"/>
+                </a:solidFill>
+              </a:defRPr>
+            </a:pPr>
+            <a:r>
+              <a:t>• Key Bullet Points: Salient bullet items highlighting critical milestones and operational alignment.</a:t>
+            </a:r>
+          </a:p>
+          <a:p>
+            <a:pPr>
+              <a:defRPr sz="1100">
+                <a:solidFill>
+                  <a:srgbClr val="94A3B8"/>
+                </a:solidFill>
+              </a:defRPr>
+            </a:pPr>
+            <a:r>
+              <a:t>• High Compression Ratio: Compresses lengthy transcripts by 65-75% without dropping critical action items.</a:t>
+            </a:r>
+          </a:p>
+          <a:p>
+            <a:pPr>
+              <a:defRPr sz="1100">
+                <a:solidFill>
+                  <a:srgbClr val="94A3B8"/>
+                </a:solidFill>
+              </a:defRPr>
+            </a:pPr>
+            <a:r>
+              <a:t>• Zero Hallucination: Grounded in TextRank eigenvector sentence centrality.</a:t>
+            </a:r>
+          </a:p>
+        </p:txBody>
+      </p:sp>
+    </p:spTree>
+  </p:cSld>
+  <p:clrMapOvr>
+    <a:masterClrMapping/>
+  </p:clrMapOvr>
+</p:sld>
+</file>
+
+<file path=ppt/slides/slide9.xml><?xml version="1.0" encoding="utf-8"?>
+<p:sld xmlns:a="http://schemas.openxmlformats.org/drawingml/2006/main" xmlns:p="http://schemas.openxmlformats.org/presentationml/2006/main" xmlns:r="http://schemas.openxmlformats.org/officeDocument/2006/relationships">
+  <p:cSld>
+    <p:spTree>
+      <p:nvGrpSpPr>
+        <p:cNvPr id="1" name=""/>
+        <p:cNvGrpSpPr/>
+        <p:nvPr/>
+      </p:nvGrpSpPr>
+      <p:grpSpPr/>
+      <p:sp>
+        <p:nvSpPr>
+          <p:cNvPr id="2" name="Rectangle 1"/>
+          <p:cNvSpPr/>
+          <p:nvPr/>
+        </p:nvSpPr>
+        <p:spPr>
+          <a:xfrm>
+            <a:off x="0" y="0"/>
+            <a:ext cx="12191695" cy="6858000"/>
+          </a:xfrm>
+          <a:prstGeom prst="rect">
+            <a:avLst/>
+          </a:prstGeom>
+          <a:solidFill>
+            <a:srgbClr val="070E17"/>
+          </a:solidFill>
+          <a:ln>
+            <a:noFill/>
+          </a:ln>
+        </p:spPr>
+        <p:style>
+          <a:lnRef idx="1">
+            <a:schemeClr val="accent1"/>
+          </a:lnRef>
+          <a:fillRef idx="3">
+            <a:schemeClr val="accent1"/>
+          </a:fillRef>
+          <a:effectRef idx="2">
+            <a:schemeClr val="accent1"/>
+          </a:effectRef>
+          <a:fontRef idx="minor">
+            <a:schemeClr val="lt1"/>
+          </a:fontRef>
+        </p:style>
+        <p:txBody>
+          <a:bodyPr rtlCol="0" anchor="ctr"/>
+          <a:lstStyle/>
+          <a:p>
+            <a:pPr algn="ctr"/>
+          </a:p>
+        </p:txBody>
+      </p:sp>
+      <p:sp>
+        <p:nvSpPr>
+          <p:cNvPr id="3" name="TextBox 2"/>
+          <p:cNvSpPr txBox="1"/>
+          <p:nvPr/>
+        </p:nvSpPr>
+        <p:spPr>
+          <a:xfrm>
+            <a:off x="731520" y="365760"/>
+            <a:ext cx="10728655" cy="1005840"/>
+          </a:xfrm>
+          <a:prstGeom prst="rect">
+            <a:avLst/>
+          </a:prstGeom>
+          <a:noFill/>
+        </p:spPr>
+        <p:txBody>
+          <a:bodyPr wrap="square">
+            <a:spAutoFit/>
+          </a:bodyPr>
+          <a:lstStyle/>
+          <a:p>
+            <a:pPr>
+              <a:defRPr sz="1100" b="1">
+                <a:solidFill>
+                  <a:srgbClr val="10B981"/>
+                </a:solidFill>
+              </a:defRPr>
+            </a:pPr>
+            <a:r>
+              <a:t>ENTERPRISE NLP &amp; MEETING INTELLIGENCE • PROJECT-023</a:t>
+            </a:r>
+          </a:p>
+          <a:p>
+            <a:pPr>
+              <a:defRPr sz="2200" b="1">
+                <a:solidFill>
+                  <a:srgbClr val="F8FAFC"/>
+                </a:solidFill>
+              </a:defRPr>
+            </a:pPr>
+            <a:r>
+              <a:t>Automated Action Item Extraction &amp; Ownership Assignment</a:t>
+            </a:r>
+          </a:p>
+        </p:txBody>
+      </p:sp>
+      <p:pic>
+        <p:nvPicPr>
+          <p:cNvPr id="4" name="Picture 3" descr="04_action_items_extraction.png"/>
+          <p:cNvPicPr>
+            <a:picLocks noChangeAspect="1"/>
+          </p:cNvPicPr>
+          <p:nvPr/>
+        </p:nvPicPr>
+        <p:blipFill>
+          <a:blip r:embed="rId2"/>
+          <a:stretch>
+            <a:fillRect/>
+          </a:stretch>
+        </p:blipFill>
+        <p:spPr>
+          <a:xfrm>
+            <a:off x="731520" y="1645920"/>
+            <a:ext cx="6766560" cy="4389120"/>
+          </a:xfrm>
+          <a:prstGeom prst="rect">
+            <a:avLst/>
+          </a:prstGeom>
+        </p:spPr>
+      </p:pic>
+      <p:sp>
+        <p:nvSpPr>
+          <p:cNvPr id="5" name="TextBox 4"/>
+          <p:cNvSpPr txBox="1"/>
+          <p:nvPr/>
+        </p:nvSpPr>
+        <p:spPr>
+          <a:xfrm>
+            <a:off x="7772400" y="1645920"/>
+            <a:ext cx="3657600" cy="4389120"/>
+          </a:xfrm>
+          <a:prstGeom prst="rect">
+            <a:avLst/>
+          </a:prstGeom>
+          <a:noFill/>
+        </p:spPr>
+        <p:txBody>
+          <a:bodyPr wrap="square">
+            <a:spAutoFit/>
+          </a:bodyPr>
+          <a:lstStyle/>
+          <a:p>
+            <a:pPr>
+              <a:defRPr sz="1600" b="1">
+                <a:solidFill>
+                  <a:srgbClr val="06B6D4"/>
+                </a:solidFill>
+              </a:defRPr>
+            </a:pPr>
+            <a:r>
+              <a:t>Task Extraction Engine</a:t>
+            </a:r>
+          </a:p>
+          <a:p>
+            <a:pPr>
+              <a:defRPr sz="1100">
+                <a:solidFill>
+                  <a:srgbClr val="94A3B8"/>
+                </a:solidFill>
+              </a:defRPr>
+            </a:pPr>
+            <a:r>
+              <a:t>• Designated Task Parsing: Extracts task commitment text directly from candidate utterances.</a:t>
+            </a:r>
+          </a:p>
+          <a:p>
+            <a:pPr>
+              <a:defRPr sz="1100">
+                <a:solidFill>
+                  <a:srgbClr val="94A3B8"/>
+                </a:solidFill>
+              </a:defRPr>
+            </a:pPr>
+            <a:r>
+              <a:t>• Speaker Attribution: Resolves assignee from speaker turn or explicit naming within the sentence.</a:t>
+            </a:r>
+          </a:p>
+          <a:p>
+            <a:pPr>
+              <a:defRPr sz="1100">
+                <a:solidFill>
+                  <a:srgbClr val="94A3B8"/>
+                </a:solidFill>
+              </a:defRPr>
+            </a:pPr>
+            <a:r>
+              <a:t>• Priority Tier Badging: Calibrated classifier assigns Critical, High, Medium, or Low priority.</a:t>
+            </a:r>
+          </a:p>
+          <a:p>
+            <a:pPr>
+              <a:defRPr sz="1100">
+                <a:solidFill>
+                  <a:srgbClr val="94A3B8"/>
+                </a:solidFill>
+              </a:defRPr>
+            </a:pPr>
+            <a:r>
+              <a:t>• Deadline Extractor: Identifies temporal markers (e.g. Tomorrow 10 AM, Friday 5 PM, End of Sprint).</a:t>
+            </a:r>
+          </a:p>
+          <a:p>
+            <a:pPr>
+              <a:defRPr sz="1100">
+                <a:solidFill>
+                  <a:srgbClr val="94A3B8"/>
+                </a:solidFill>
+              </a:defRPr>
+            </a:pPr>
+            <a:r>
+              <a:t>• Interactive Checkbox: Support marking tasks as complete directly on the dashboard.</a:t>
             </a:r>
           </a:p>
         </p:txBody>
